--- a/Rakshak_AI_Master_Presentation.pptx
+++ b/Rakshak_AI_Master_Presentation.pptx
@@ -5,26 +5,26 @@
     <p:sldMasterId id="2147483648" r:id="rId1"/>
   </p:sldMasterIdLst>
   <p:sldIdLst>
-    <p:sldId id="256" r:id="rId7"/>
-    <p:sldId id="257" r:id="rId8"/>
-    <p:sldId id="258" r:id="rId9"/>
-    <p:sldId id="259" r:id="rId10"/>
-    <p:sldId id="260" r:id="rId11"/>
-    <p:sldId id="261" r:id="rId12"/>
-    <p:sldId id="262" r:id="rId13"/>
-    <p:sldId id="263" r:id="rId14"/>
-    <p:sldId id="264" r:id="rId15"/>
-    <p:sldId id="265" r:id="rId16"/>
-    <p:sldId id="266" r:id="rId17"/>
-    <p:sldId id="267" r:id="rId18"/>
-    <p:sldId id="268" r:id="rId19"/>
-    <p:sldId id="269" r:id="rId20"/>
-    <p:sldId id="270" r:id="rId21"/>
-    <p:sldId id="271" r:id="rId22"/>
-    <p:sldId id="272" r:id="rId23"/>
-    <p:sldId id="273" r:id="rId24"/>
+    <p:sldId id="256" r:id="rId2"/>
+    <p:sldId id="257" r:id="rId3"/>
+    <p:sldId id="258" r:id="rId4"/>
+    <p:sldId id="259" r:id="rId5"/>
+    <p:sldId id="260" r:id="rId6"/>
+    <p:sldId id="261" r:id="rId7"/>
+    <p:sldId id="262" r:id="rId8"/>
+    <p:sldId id="263" r:id="rId9"/>
+    <p:sldId id="264" r:id="rId10"/>
+    <p:sldId id="265" r:id="rId11"/>
+    <p:sldId id="266" r:id="rId12"/>
+    <p:sldId id="267" r:id="rId13"/>
+    <p:sldId id="268" r:id="rId14"/>
+    <p:sldId id="269" r:id="rId15"/>
+    <p:sldId id="270" r:id="rId16"/>
+    <p:sldId id="271" r:id="rId17"/>
+    <p:sldId id="272" r:id="rId18"/>
+    <p:sldId id="273" r:id="rId19"/>
   </p:sldIdLst>
-  <p:sldSz cx="12191695" cy="6858000" type="screen4x3"/>
+  <p:sldSz cx="12192000" cy="6858000"/>
   <p:notesSz cx="6858000" cy="9144000"/>
   <p:defaultTextStyle>
     <a:defPPr>
@@ -121,6 +121,22 @@
       </a:defRPr>
     </a:lvl9pPr>
   </p:defaultTextStyle>
+  <p:extLst>
+    <p:ext uri="{EFAFB233-063F-42B5-8137-9DF3F51BA10A}">
+      <p15:sldGuideLst xmlns:p15="http://schemas.microsoft.com/office/powerpoint/2012/main">
+        <p15:guide id="1" orient="horz" pos="2160">
+          <p15:clr>
+            <a:srgbClr val="A4A3A4"/>
+          </p15:clr>
+        </p15:guide>
+        <p15:guide id="2" pos="2880">
+          <p15:clr>
+            <a:srgbClr val="A4A3A4"/>
+          </p15:clr>
+        </p15:guide>
+      </p15:sldGuideLst>
+    </p:ext>
+  </p:extLst>
 </p:presentation>
 </file>
 
@@ -162,10 +178,9 @@
           <a:lstStyle/>
           <a:p>
             <a:r>
-              <a:rPr lang="en-US" smtClean="0"/>
+              <a:rPr lang="en-US"/>
               <a:t>Click to edit Master title style</a:t>
             </a:r>
-            <a:endParaRPr lang="en-US"/>
           </a:p>
         </p:txBody>
       </p:sp>
@@ -281,10 +296,9 @@
           </a:lstStyle>
           <a:p>
             <a:r>
-              <a:rPr lang="en-US" smtClean="0"/>
+              <a:rPr lang="en-US"/>
               <a:t>Click to edit Master subtitle style</a:t>
             </a:r>
-            <a:endParaRPr lang="en-US"/>
           </a:p>
         </p:txBody>
       </p:sp>
@@ -305,7 +319,7 @@
           <a:p>
             <a:fld id="{5BCAD085-E8A6-8845-BD4E-CB4CCA059FC4}" type="datetimeFigureOut">
               <a:rPr lang="en-US" smtClean="0"/>
-              <a:t>1/27/13</a:t>
+              <a:t>10/13/2026</a:t>
             </a:fld>
             <a:endParaRPr lang="en-US"/>
           </a:p>
@@ -399,10 +413,9 @@
           <a:lstStyle/>
           <a:p>
             <a:r>
-              <a:rPr lang="en-US" smtClean="0"/>
+              <a:rPr lang="en-US"/>
               <a:t>Click to edit Master title style</a:t>
             </a:r>
-            <a:endParaRPr lang="en-US"/>
           </a:p>
         </p:txBody>
       </p:sp>
@@ -423,38 +436,37 @@
           <a:p>
             <a:pPr lvl="0"/>
             <a:r>
-              <a:rPr lang="en-US" smtClean="0"/>
+              <a:rPr lang="en-US"/>
               <a:t>Click to edit Master text styles</a:t>
             </a:r>
           </a:p>
           <a:p>
             <a:pPr lvl="1"/>
             <a:r>
-              <a:rPr lang="en-US" smtClean="0"/>
+              <a:rPr lang="en-US"/>
               <a:t>Second level</a:t>
             </a:r>
           </a:p>
           <a:p>
             <a:pPr lvl="2"/>
             <a:r>
-              <a:rPr lang="en-US" smtClean="0"/>
+              <a:rPr lang="en-US"/>
               <a:t>Third level</a:t>
             </a:r>
           </a:p>
           <a:p>
             <a:pPr lvl="3"/>
             <a:r>
-              <a:rPr lang="en-US" smtClean="0"/>
+              <a:rPr lang="en-US"/>
               <a:t>Fourth level</a:t>
             </a:r>
           </a:p>
           <a:p>
             <a:pPr lvl="4"/>
             <a:r>
-              <a:rPr lang="en-US" smtClean="0"/>
+              <a:rPr lang="en-US"/>
               <a:t>Fifth level</a:t>
             </a:r>
-            <a:endParaRPr lang="en-US"/>
           </a:p>
         </p:txBody>
       </p:sp>
@@ -475,7 +487,7 @@
           <a:p>
             <a:fld id="{5BCAD085-E8A6-8845-BD4E-CB4CCA059FC4}" type="datetimeFigureOut">
               <a:rPr lang="en-US" smtClean="0"/>
-              <a:t>1/27/13</a:t>
+              <a:t>10/13/2026</a:t>
             </a:fld>
             <a:endParaRPr lang="en-US"/>
           </a:p>
@@ -574,10 +586,9 @@
           <a:lstStyle/>
           <a:p>
             <a:r>
-              <a:rPr lang="en-US" smtClean="0"/>
+              <a:rPr lang="en-US"/>
               <a:t>Click to edit Master title style</a:t>
             </a:r>
-            <a:endParaRPr lang="en-US"/>
           </a:p>
         </p:txBody>
       </p:sp>
@@ -603,38 +614,37 @@
           <a:p>
             <a:pPr lvl="0"/>
             <a:r>
-              <a:rPr lang="en-US" smtClean="0"/>
+              <a:rPr lang="en-US"/>
               <a:t>Click to edit Master text styles</a:t>
             </a:r>
           </a:p>
           <a:p>
             <a:pPr lvl="1"/>
             <a:r>
-              <a:rPr lang="en-US" smtClean="0"/>
+              <a:rPr lang="en-US"/>
               <a:t>Second level</a:t>
             </a:r>
           </a:p>
           <a:p>
             <a:pPr lvl="2"/>
             <a:r>
-              <a:rPr lang="en-US" smtClean="0"/>
+              <a:rPr lang="en-US"/>
               <a:t>Third level</a:t>
             </a:r>
           </a:p>
           <a:p>
             <a:pPr lvl="3"/>
             <a:r>
-              <a:rPr lang="en-US" smtClean="0"/>
+              <a:rPr lang="en-US"/>
               <a:t>Fourth level</a:t>
             </a:r>
           </a:p>
           <a:p>
             <a:pPr lvl="4"/>
             <a:r>
-              <a:rPr lang="en-US" smtClean="0"/>
+              <a:rPr lang="en-US"/>
               <a:t>Fifth level</a:t>
             </a:r>
-            <a:endParaRPr lang="en-US"/>
           </a:p>
         </p:txBody>
       </p:sp>
@@ -655,7 +665,7 @@
           <a:p>
             <a:fld id="{5BCAD085-E8A6-8845-BD4E-CB4CCA059FC4}" type="datetimeFigureOut">
               <a:rPr lang="en-US" smtClean="0"/>
-              <a:t>1/27/13</a:t>
+              <a:t>10/13/2026</a:t>
             </a:fld>
             <a:endParaRPr lang="en-US"/>
           </a:p>
@@ -749,10 +759,9 @@
           <a:lstStyle/>
           <a:p>
             <a:r>
-              <a:rPr lang="en-US" smtClean="0"/>
+              <a:rPr lang="en-US"/>
               <a:t>Click to edit Master title style</a:t>
             </a:r>
-            <a:endParaRPr lang="en-US"/>
           </a:p>
         </p:txBody>
       </p:sp>
@@ -773,38 +782,37 @@
           <a:p>
             <a:pPr lvl="0"/>
             <a:r>
-              <a:rPr lang="en-US" smtClean="0"/>
+              <a:rPr lang="en-US"/>
               <a:t>Click to edit Master text styles</a:t>
             </a:r>
           </a:p>
           <a:p>
             <a:pPr lvl="1"/>
             <a:r>
-              <a:rPr lang="en-US" smtClean="0"/>
+              <a:rPr lang="en-US"/>
               <a:t>Second level</a:t>
             </a:r>
           </a:p>
           <a:p>
             <a:pPr lvl="2"/>
             <a:r>
-              <a:rPr lang="en-US" smtClean="0"/>
+              <a:rPr lang="en-US"/>
               <a:t>Third level</a:t>
             </a:r>
           </a:p>
           <a:p>
             <a:pPr lvl="3"/>
             <a:r>
-              <a:rPr lang="en-US" smtClean="0"/>
+              <a:rPr lang="en-US"/>
               <a:t>Fourth level</a:t>
             </a:r>
           </a:p>
           <a:p>
             <a:pPr lvl="4"/>
             <a:r>
-              <a:rPr lang="en-US" smtClean="0"/>
+              <a:rPr lang="en-US"/>
               <a:t>Fifth level</a:t>
             </a:r>
-            <a:endParaRPr lang="en-US"/>
           </a:p>
         </p:txBody>
       </p:sp>
@@ -825,7 +833,7 @@
           <a:p>
             <a:fld id="{5BCAD085-E8A6-8845-BD4E-CB4CCA059FC4}" type="datetimeFigureOut">
               <a:rPr lang="en-US" smtClean="0"/>
-              <a:t>1/27/13</a:t>
+              <a:t>10/13/2026</a:t>
             </a:fld>
             <a:endParaRPr lang="en-US"/>
           </a:p>
@@ -928,10 +936,9 @@
           </a:lstStyle>
           <a:p>
             <a:r>
-              <a:rPr lang="en-US" smtClean="0"/>
+              <a:rPr lang="en-US"/>
               <a:t>Click to edit Master title style</a:t>
             </a:r>
-            <a:endParaRPr lang="en-US"/>
           </a:p>
         </p:txBody>
       </p:sp>
@@ -1048,7 +1055,7 @@
           <a:p>
             <a:pPr lvl="0"/>
             <a:r>
-              <a:rPr lang="en-US" smtClean="0"/>
+              <a:rPr lang="en-US"/>
               <a:t>Click to edit Master text styles</a:t>
             </a:r>
           </a:p>
@@ -1071,7 +1078,7 @@
           <a:p>
             <a:fld id="{5BCAD085-E8A6-8845-BD4E-CB4CCA059FC4}" type="datetimeFigureOut">
               <a:rPr lang="en-US" smtClean="0"/>
-              <a:t>1/27/13</a:t>
+              <a:t>10/13/2026</a:t>
             </a:fld>
             <a:endParaRPr lang="en-US"/>
           </a:p>
@@ -1165,10 +1172,9 @@
           <a:lstStyle/>
           <a:p>
             <a:r>
-              <a:rPr lang="en-US" smtClean="0"/>
+              <a:rPr lang="en-US"/>
               <a:t>Click to edit Master title style</a:t>
             </a:r>
-            <a:endParaRPr lang="en-US"/>
           </a:p>
         </p:txBody>
       </p:sp>
@@ -1222,38 +1228,37 @@
           <a:p>
             <a:pPr lvl="0"/>
             <a:r>
-              <a:rPr lang="en-US" smtClean="0"/>
+              <a:rPr lang="en-US"/>
               <a:t>Click to edit Master text styles</a:t>
             </a:r>
           </a:p>
           <a:p>
             <a:pPr lvl="1"/>
             <a:r>
-              <a:rPr lang="en-US" smtClean="0"/>
+              <a:rPr lang="en-US"/>
               <a:t>Second level</a:t>
             </a:r>
           </a:p>
           <a:p>
             <a:pPr lvl="2"/>
             <a:r>
-              <a:rPr lang="en-US" smtClean="0"/>
+              <a:rPr lang="en-US"/>
               <a:t>Third level</a:t>
             </a:r>
           </a:p>
           <a:p>
             <a:pPr lvl="3"/>
             <a:r>
-              <a:rPr lang="en-US" smtClean="0"/>
+              <a:rPr lang="en-US"/>
               <a:t>Fourth level</a:t>
             </a:r>
           </a:p>
           <a:p>
             <a:pPr lvl="4"/>
             <a:r>
-              <a:rPr lang="en-US" smtClean="0"/>
+              <a:rPr lang="en-US"/>
               <a:t>Fifth level</a:t>
             </a:r>
-            <a:endParaRPr lang="en-US"/>
           </a:p>
         </p:txBody>
       </p:sp>
@@ -1307,38 +1312,37 @@
           <a:p>
             <a:pPr lvl="0"/>
             <a:r>
-              <a:rPr lang="en-US" smtClean="0"/>
+              <a:rPr lang="en-US"/>
               <a:t>Click to edit Master text styles</a:t>
             </a:r>
           </a:p>
           <a:p>
             <a:pPr lvl="1"/>
             <a:r>
-              <a:rPr lang="en-US" smtClean="0"/>
+              <a:rPr lang="en-US"/>
               <a:t>Second level</a:t>
             </a:r>
           </a:p>
           <a:p>
             <a:pPr lvl="2"/>
             <a:r>
-              <a:rPr lang="en-US" smtClean="0"/>
+              <a:rPr lang="en-US"/>
               <a:t>Third level</a:t>
             </a:r>
           </a:p>
           <a:p>
             <a:pPr lvl="3"/>
             <a:r>
-              <a:rPr lang="en-US" smtClean="0"/>
+              <a:rPr lang="en-US"/>
               <a:t>Fourth level</a:t>
             </a:r>
           </a:p>
           <a:p>
             <a:pPr lvl="4"/>
             <a:r>
-              <a:rPr lang="en-US" smtClean="0"/>
+              <a:rPr lang="en-US"/>
               <a:t>Fifth level</a:t>
             </a:r>
-            <a:endParaRPr lang="en-US"/>
           </a:p>
         </p:txBody>
       </p:sp>
@@ -1359,7 +1363,7 @@
           <a:p>
             <a:fld id="{5BCAD085-E8A6-8845-BD4E-CB4CCA059FC4}" type="datetimeFigureOut">
               <a:rPr lang="en-US" smtClean="0"/>
-              <a:t>1/27/13</a:t>
+              <a:t>10/13/2026</a:t>
             </a:fld>
             <a:endParaRPr lang="en-US"/>
           </a:p>
@@ -1457,10 +1461,9 @@
           </a:lstStyle>
           <a:p>
             <a:r>
-              <a:rPr lang="en-US" smtClean="0"/>
+              <a:rPr lang="en-US"/>
               <a:t>Click to edit Master title style</a:t>
             </a:r>
-            <a:endParaRPr lang="en-US"/>
           </a:p>
         </p:txBody>
       </p:sp>
@@ -1523,7 +1526,7 @@
           <a:p>
             <a:pPr lvl="0"/>
             <a:r>
-              <a:rPr lang="en-US" smtClean="0"/>
+              <a:rPr lang="en-US"/>
               <a:t>Click to edit Master text styles</a:t>
             </a:r>
           </a:p>
@@ -1579,38 +1582,37 @@
           <a:p>
             <a:pPr lvl="0"/>
             <a:r>
-              <a:rPr lang="en-US" smtClean="0"/>
+              <a:rPr lang="en-US"/>
               <a:t>Click to edit Master text styles</a:t>
             </a:r>
           </a:p>
           <a:p>
             <a:pPr lvl="1"/>
             <a:r>
-              <a:rPr lang="en-US" smtClean="0"/>
+              <a:rPr lang="en-US"/>
               <a:t>Second level</a:t>
             </a:r>
           </a:p>
           <a:p>
             <a:pPr lvl="2"/>
             <a:r>
-              <a:rPr lang="en-US" smtClean="0"/>
+              <a:rPr lang="en-US"/>
               <a:t>Third level</a:t>
             </a:r>
           </a:p>
           <a:p>
             <a:pPr lvl="3"/>
             <a:r>
-              <a:rPr lang="en-US" smtClean="0"/>
+              <a:rPr lang="en-US"/>
               <a:t>Fourth level</a:t>
             </a:r>
           </a:p>
           <a:p>
             <a:pPr lvl="4"/>
             <a:r>
-              <a:rPr lang="en-US" smtClean="0"/>
+              <a:rPr lang="en-US"/>
               <a:t>Fifth level</a:t>
             </a:r>
-            <a:endParaRPr lang="en-US"/>
           </a:p>
         </p:txBody>
       </p:sp>
@@ -1673,7 +1675,7 @@
           <a:p>
             <a:pPr lvl="0"/>
             <a:r>
-              <a:rPr lang="en-US" smtClean="0"/>
+              <a:rPr lang="en-US"/>
               <a:t>Click to edit Master text styles</a:t>
             </a:r>
           </a:p>
@@ -1729,38 +1731,37 @@
           <a:p>
             <a:pPr lvl="0"/>
             <a:r>
-              <a:rPr lang="en-US" smtClean="0"/>
+              <a:rPr lang="en-US"/>
               <a:t>Click to edit Master text styles</a:t>
             </a:r>
           </a:p>
           <a:p>
             <a:pPr lvl="1"/>
             <a:r>
-              <a:rPr lang="en-US" smtClean="0"/>
+              <a:rPr lang="en-US"/>
               <a:t>Second level</a:t>
             </a:r>
           </a:p>
           <a:p>
             <a:pPr lvl="2"/>
             <a:r>
-              <a:rPr lang="en-US" smtClean="0"/>
+              <a:rPr lang="en-US"/>
               <a:t>Third level</a:t>
             </a:r>
           </a:p>
           <a:p>
             <a:pPr lvl="3"/>
             <a:r>
-              <a:rPr lang="en-US" smtClean="0"/>
+              <a:rPr lang="en-US"/>
               <a:t>Fourth level</a:t>
             </a:r>
           </a:p>
           <a:p>
             <a:pPr lvl="4"/>
             <a:r>
-              <a:rPr lang="en-US" smtClean="0"/>
+              <a:rPr lang="en-US"/>
               <a:t>Fifth level</a:t>
             </a:r>
-            <a:endParaRPr lang="en-US"/>
           </a:p>
         </p:txBody>
       </p:sp>
@@ -1781,7 +1782,7 @@
           <a:p>
             <a:fld id="{5BCAD085-E8A6-8845-BD4E-CB4CCA059FC4}" type="datetimeFigureOut">
               <a:rPr lang="en-US" smtClean="0"/>
-              <a:t>1/27/13</a:t>
+              <a:t>10/13/2026</a:t>
             </a:fld>
             <a:endParaRPr lang="en-US"/>
           </a:p>
@@ -1875,10 +1876,9 @@
           <a:lstStyle/>
           <a:p>
             <a:r>
-              <a:rPr lang="en-US" smtClean="0"/>
+              <a:rPr lang="en-US"/>
               <a:t>Click to edit Master title style</a:t>
             </a:r>
-            <a:endParaRPr lang="en-US"/>
           </a:p>
         </p:txBody>
       </p:sp>
@@ -1899,7 +1899,7 @@
           <a:p>
             <a:fld id="{5BCAD085-E8A6-8845-BD4E-CB4CCA059FC4}" type="datetimeFigureOut">
               <a:rPr lang="en-US" smtClean="0"/>
-              <a:t>1/27/13</a:t>
+              <a:t>10/13/2026</a:t>
             </a:fld>
             <a:endParaRPr lang="en-US"/>
           </a:p>
@@ -1994,7 +1994,7 @@
           <a:p>
             <a:fld id="{5BCAD085-E8A6-8845-BD4E-CB4CCA059FC4}" type="datetimeFigureOut">
               <a:rPr lang="en-US" smtClean="0"/>
-              <a:t>1/27/13</a:t>
+              <a:t>10/13/2026</a:t>
             </a:fld>
             <a:endParaRPr lang="en-US"/>
           </a:p>
@@ -2097,10 +2097,9 @@
           </a:lstStyle>
           <a:p>
             <a:r>
-              <a:rPr lang="en-US" smtClean="0"/>
+              <a:rPr lang="en-US"/>
               <a:t>Click to edit Master title style</a:t>
             </a:r>
-            <a:endParaRPr lang="en-US"/>
           </a:p>
         </p:txBody>
       </p:sp>
@@ -2154,38 +2153,37 @@
           <a:p>
             <a:pPr lvl="0"/>
             <a:r>
-              <a:rPr lang="en-US" smtClean="0"/>
+              <a:rPr lang="en-US"/>
               <a:t>Click to edit Master text styles</a:t>
             </a:r>
           </a:p>
           <a:p>
             <a:pPr lvl="1"/>
             <a:r>
-              <a:rPr lang="en-US" smtClean="0"/>
+              <a:rPr lang="en-US"/>
               <a:t>Second level</a:t>
             </a:r>
           </a:p>
           <a:p>
             <a:pPr lvl="2"/>
             <a:r>
-              <a:rPr lang="en-US" smtClean="0"/>
+              <a:rPr lang="en-US"/>
               <a:t>Third level</a:t>
             </a:r>
           </a:p>
           <a:p>
             <a:pPr lvl="3"/>
             <a:r>
-              <a:rPr lang="en-US" smtClean="0"/>
+              <a:rPr lang="en-US"/>
               <a:t>Fourth level</a:t>
             </a:r>
           </a:p>
           <a:p>
             <a:pPr lvl="4"/>
             <a:r>
-              <a:rPr lang="en-US" smtClean="0"/>
+              <a:rPr lang="en-US"/>
               <a:t>Fifth level</a:t>
             </a:r>
-            <a:endParaRPr lang="en-US"/>
           </a:p>
         </p:txBody>
       </p:sp>
@@ -2248,7 +2246,7 @@
           <a:p>
             <a:pPr lvl="0"/>
             <a:r>
-              <a:rPr lang="en-US" smtClean="0"/>
+              <a:rPr lang="en-US"/>
               <a:t>Click to edit Master text styles</a:t>
             </a:r>
           </a:p>
@@ -2271,7 +2269,7 @@
           <a:p>
             <a:fld id="{5BCAD085-E8A6-8845-BD4E-CB4CCA059FC4}" type="datetimeFigureOut">
               <a:rPr lang="en-US" smtClean="0"/>
-              <a:t>1/27/13</a:t>
+              <a:t>10/13/2026</a:t>
             </a:fld>
             <a:endParaRPr lang="en-US"/>
           </a:p>
@@ -2374,10 +2372,9 @@
           </a:lstStyle>
           <a:p>
             <a:r>
-              <a:rPr lang="en-US" smtClean="0"/>
+              <a:rPr lang="en-US"/>
               <a:t>Click to edit Master title style</a:t>
             </a:r>
-            <a:endParaRPr lang="en-US"/>
           </a:p>
         </p:txBody>
       </p:sp>
@@ -2501,7 +2498,7 @@
           <a:p>
             <a:pPr lvl="0"/>
             <a:r>
-              <a:rPr lang="en-US" smtClean="0"/>
+              <a:rPr lang="en-US"/>
               <a:t>Click to edit Master text styles</a:t>
             </a:r>
           </a:p>
@@ -2524,7 +2521,7 @@
           <a:p>
             <a:fld id="{5BCAD085-E8A6-8845-BD4E-CB4CCA059FC4}" type="datetimeFigureOut">
               <a:rPr lang="en-US" smtClean="0"/>
-              <a:t>1/27/13</a:t>
+              <a:t>10/13/2026</a:t>
             </a:fld>
             <a:endParaRPr lang="en-US"/>
           </a:p>
@@ -2633,10 +2630,9 @@
           <a:lstStyle/>
           <a:p>
             <a:r>
-              <a:rPr lang="en-US" smtClean="0"/>
+              <a:rPr lang="en-US"/>
               <a:t>Click to edit Master title style</a:t>
             </a:r>
-            <a:endParaRPr lang="en-US"/>
           </a:p>
         </p:txBody>
       </p:sp>
@@ -2667,38 +2663,37 @@
           <a:p>
             <a:pPr lvl="0"/>
             <a:r>
-              <a:rPr lang="en-US" smtClean="0"/>
+              <a:rPr lang="en-US"/>
               <a:t>Click to edit Master text styles</a:t>
             </a:r>
           </a:p>
           <a:p>
             <a:pPr lvl="1"/>
             <a:r>
-              <a:rPr lang="en-US" smtClean="0"/>
+              <a:rPr lang="en-US"/>
               <a:t>Second level</a:t>
             </a:r>
           </a:p>
           <a:p>
             <a:pPr lvl="2"/>
             <a:r>
-              <a:rPr lang="en-US" smtClean="0"/>
+              <a:rPr lang="en-US"/>
               <a:t>Third level</a:t>
             </a:r>
           </a:p>
           <a:p>
             <a:pPr lvl="3"/>
             <a:r>
-              <a:rPr lang="en-US" smtClean="0"/>
+              <a:rPr lang="en-US"/>
               <a:t>Fourth level</a:t>
             </a:r>
           </a:p>
           <a:p>
             <a:pPr lvl="4"/>
             <a:r>
-              <a:rPr lang="en-US" smtClean="0"/>
+              <a:rPr lang="en-US"/>
               <a:t>Fifth level</a:t>
             </a:r>
-            <a:endParaRPr lang="en-US"/>
           </a:p>
         </p:txBody>
       </p:sp>
@@ -2737,7 +2732,7 @@
           <a:p>
             <a:fld id="{5BCAD085-E8A6-8845-BD4E-CB4CCA059FC4}" type="datetimeFigureOut">
               <a:rPr lang="en-US" smtClean="0"/>
-              <a:t>1/27/13</a:t>
+              <a:t>10/13/2026</a:t>
             </a:fld>
             <a:endParaRPr lang="en-US"/>
           </a:p>
@@ -3096,7 +3091,7 @@
 </file>
 
 <file path=ppt/slides/slide1.xml><?xml version="1.0" encoding="utf-8"?>
-<p:sld xmlns:a="http://schemas.openxmlformats.org/drawingml/2006/main" xmlns:p="http://schemas.openxmlformats.org/presentationml/2006/main" xmlns:r="http://schemas.openxmlformats.org/officeDocument/2006/relationships">
+<p:sld xmlns:a="http://schemas.openxmlformats.org/drawingml/2006/main" xmlns:r="http://schemas.openxmlformats.org/officeDocument/2006/relationships" xmlns:p="http://schemas.openxmlformats.org/presentationml/2006/main">
   <p:cSld>
     <p:spTree>
       <p:nvGrpSpPr>
@@ -3104,7 +3099,14 @@
         <p:cNvGrpSpPr/>
         <p:nvPr/>
       </p:nvGrpSpPr>
-      <p:grpSpPr/>
+      <p:grpSpPr>
+        <a:xfrm>
+          <a:off x="0" y="0"/>
+          <a:ext cx="0" cy="0"/>
+          <a:chOff x="0" y="0"/>
+          <a:chExt cx="0" cy="0"/>
+        </a:xfrm>
+      </p:grpSpPr>
       <p:sp>
         <p:nvSpPr>
           <p:cNvPr id="2" name="Rectangle 1"/>
@@ -3145,6 +3147,7 @@
           <a:lstStyle/>
           <a:p>
             <a:pPr algn="ctr"/>
+            <a:endParaRPr/>
           </a:p>
         </p:txBody>
       </p:sp>
@@ -3190,19 +3193,20 @@
           <a:lstStyle/>
           <a:p>
             <a:pPr algn="ctr"/>
-          </a:p>
-        </p:txBody>
-      </p:sp>
-      <p:sp>
-        <p:nvSpPr>
-          <p:cNvPr id="4" name="TextBox 3"/>
+            <a:endParaRPr/>
+          </a:p>
+        </p:txBody>
+      </p:sp>
+      <p:sp>
+        <p:nvSpPr>
+          <p:cNvPr id="5" name="TextBox 4"/>
           <p:cNvSpPr txBox="1"/>
           <p:nvPr/>
         </p:nvSpPr>
         <p:spPr>
           <a:xfrm>
-            <a:off x="1280160" y="1645920"/>
-            <a:ext cx="9144000" cy="457200"/>
+            <a:off x="1280160" y="2011680"/>
+            <a:ext cx="9601200" cy="1097280"/>
           </a:xfrm>
           <a:prstGeom prst="rect">
             <a:avLst/>
@@ -3216,27 +3220,95 @@
           <a:lstStyle/>
           <a:p>
             <a:r>
-              <a:rPr sz="1200" b="1">
-                <a:solidFill>
-                  <a:srgbClr val="10B981"/>
-                </a:solidFill>
-                <a:latin typeface="Segoe UI"/>
-              </a:rPr>
-              <a:t>NATIONAL HACKATHON INNOVATION • HEALTHCARE &amp; SMART CITIES</a:t>
-            </a:r>
-          </a:p>
-        </p:txBody>
-      </p:sp>
-      <p:sp>
-        <p:nvSpPr>
-          <p:cNvPr id="5" name="TextBox 4"/>
+              <a:rPr sz="4800" b="1">
+                <a:solidFill>
+                  <a:srgbClr val="F8FAFC"/>
+                </a:solidFill>
+                <a:latin typeface="Segoe UI"/>
+              </a:rPr>
+              <a:t>RAKSHAK-AI</a:t>
+            </a:r>
+          </a:p>
+        </p:txBody>
+      </p:sp>
+      <p:sp>
+        <p:nvSpPr>
+          <p:cNvPr id="6" name="TextBox 5"/>
           <p:cNvSpPr txBox="1"/>
           <p:nvPr/>
         </p:nvSpPr>
         <p:spPr>
           <a:xfrm>
-            <a:off x="1280160" y="2011680"/>
-            <a:ext cx="9601200" cy="1097280"/>
+            <a:off x="1280160" y="3108960"/>
+            <a:ext cx="9601200" cy="822960"/>
+          </a:xfrm>
+          <a:prstGeom prst="rect">
+            <a:avLst/>
+          </a:prstGeom>
+          <a:noFill/>
+        </p:spPr>
+        <p:txBody>
+          <a:bodyPr wrap="square">
+            <a:spAutoFit/>
+          </a:bodyPr>
+          <a:lstStyle/>
+          <a:p>
+            <a:r>
+              <a:rPr sz="1800" b="1">
+                <a:solidFill>
+                  <a:srgbClr val="38BDF8"/>
+                </a:solidFill>
+                <a:latin typeface="Segoe UI"/>
+              </a:rPr>
+              <a:t>Autonomous AI Emergency Guardianship, Dynamic Green Wave Signal Preemption &amp; Zero-Storage Visual Trauma Triage</a:t>
+            </a:r>
+          </a:p>
+        </p:txBody>
+      </p:sp>
+      <p:sp>
+        <p:nvSpPr>
+          <p:cNvPr id="7" name="TextBox 6"/>
+          <p:cNvSpPr txBox="1"/>
+          <p:nvPr/>
+        </p:nvSpPr>
+        <p:spPr>
+          <a:xfrm>
+            <a:off x="1280160" y="3931920"/>
+            <a:ext cx="9601200" cy="914400"/>
+          </a:xfrm>
+          <a:prstGeom prst="rect">
+            <a:avLst/>
+          </a:prstGeom>
+          <a:noFill/>
+        </p:spPr>
+        <p:txBody>
+          <a:bodyPr wrap="square">
+            <a:spAutoFit/>
+          </a:bodyPr>
+          <a:lstStyle/>
+          <a:p>
+            <a:r>
+              <a:rPr sz="1300" b="0">
+                <a:solidFill>
+                  <a:srgbClr val="94A3B8"/>
+                </a:solidFill>
+                <a:latin typeface="Segoe UI"/>
+              </a:rPr>
+              <a:t>Solving India's road accident crisis by bridging the Golden Hour. Features on-device TFLite crash detection, C-V2X autonomous traffic signal preemption, physics-informed crash biomechanics (PINN), and zero-knowledge Ayushman Bharat (ABDM/ABHA) health vault.</a:t>
+            </a:r>
+          </a:p>
+        </p:txBody>
+      </p:sp>
+      <p:sp>
+        <p:nvSpPr>
+          <p:cNvPr id="8" name="TextBox 7"/>
+          <p:cNvSpPr txBox="1"/>
+          <p:nvPr/>
+        </p:nvSpPr>
+        <p:spPr>
+          <a:xfrm>
+            <a:off x="1280160" y="4937760"/>
+            <a:ext cx="7544053" cy="261610"/>
           </a:xfrm>
           <a:prstGeom prst="rect">
             <a:avLst/>
@@ -3250,115 +3322,31 @@
           <a:lstStyle/>
           <a:p>
             <a:r>
-              <a:rPr sz="4800" b="1">
-                <a:solidFill>
-                  <a:srgbClr val="F8FAFC"/>
-                </a:solidFill>
-                <a:latin typeface="Segoe UI"/>
-              </a:rPr>
-              <a:t>RAKSHAK-AI</a:t>
-            </a:r>
-          </a:p>
-        </p:txBody>
-      </p:sp>
-      <p:sp>
-        <p:nvSpPr>
-          <p:cNvPr id="6" name="TextBox 5"/>
-          <p:cNvSpPr txBox="1"/>
-          <p:nvPr/>
-        </p:nvSpPr>
-        <p:spPr>
-          <a:xfrm>
-            <a:off x="1280160" y="3108960"/>
-            <a:ext cx="9601200" cy="822960"/>
-          </a:xfrm>
-          <a:prstGeom prst="rect">
-            <a:avLst/>
-          </a:prstGeom>
-          <a:noFill/>
-        </p:spPr>
-        <p:txBody>
-          <a:bodyPr wrap="square">
-            <a:spAutoFit/>
-          </a:bodyPr>
-          <a:lstStyle/>
-          <a:p>
-            <a:r>
-              <a:rPr sz="1800" b="1">
-                <a:solidFill>
-                  <a:srgbClr val="38BDF8"/>
-                </a:solidFill>
-                <a:latin typeface="Segoe UI"/>
-              </a:rPr>
-              <a:t>Autonomous AI Emergency Guardianship, Dynamic Green Wave Signal Preemption &amp; Zero-Storage Visual Trauma Triage</a:t>
-            </a:r>
-          </a:p>
-        </p:txBody>
-      </p:sp>
-      <p:sp>
-        <p:nvSpPr>
-          <p:cNvPr id="7" name="TextBox 6"/>
-          <p:cNvSpPr txBox="1"/>
-          <p:nvPr/>
-        </p:nvSpPr>
-        <p:spPr>
-          <a:xfrm>
-            <a:off x="1280160" y="3931920"/>
-            <a:ext cx="9601200" cy="914400"/>
-          </a:xfrm>
-          <a:prstGeom prst="rect">
-            <a:avLst/>
-          </a:prstGeom>
-          <a:noFill/>
-        </p:spPr>
-        <p:txBody>
-          <a:bodyPr wrap="square">
-            <a:spAutoFit/>
-          </a:bodyPr>
-          <a:lstStyle/>
-          <a:p>
-            <a:r>
-              <a:rPr sz="1300" b="0">
-                <a:solidFill>
-                  <a:srgbClr val="94A3B8"/>
-                </a:solidFill>
-                <a:latin typeface="Segoe UI"/>
-              </a:rPr>
-              <a:t>Solving India's road accident crisis by bridging the Golden Hour. Features on-device TFLite crash detection, C-V2X autonomous traffic signal preemption, physics-informed crash biomechanics (PINN), and zero-knowledge Ayushman Bharat (ABDM/ABHA) health vault.</a:t>
-            </a:r>
-          </a:p>
-        </p:txBody>
-      </p:sp>
-      <p:sp>
-        <p:nvSpPr>
-          <p:cNvPr id="8" name="TextBox 7"/>
-          <p:cNvSpPr txBox="1"/>
-          <p:nvPr/>
-        </p:nvSpPr>
-        <p:spPr>
-          <a:xfrm>
-            <a:off x="1280160" y="4937760"/>
-            <a:ext cx="9601200" cy="457200"/>
-          </a:xfrm>
-          <a:prstGeom prst="rect">
-            <a:avLst/>
-          </a:prstGeom>
-          <a:noFill/>
-        </p:spPr>
-        <p:txBody>
-          <a:bodyPr wrap="none">
-            <a:spAutoFit/>
-          </a:bodyPr>
-          <a:lstStyle/>
-          <a:p>
-            <a:r>
-              <a:rPr sz="1100" b="1">
+              <a:rPr sz="1100" b="1" dirty="0">
                 <a:solidFill>
                   <a:srgbClr val="F59E0B"/>
                 </a:solidFill>
                 <a:latin typeface="Segoe UI"/>
               </a:rPr>
-              <a:t>⚡ Built for Indian Metros (Bengaluru Pilot)  |  🔒 DPDP Act 2023 Compliant  |  🚑 75% Transit Time Reduction</a:t>
+              <a:t>⚡ Built for Indian Metros (Bengaluru Pilot)  |  🔒 DPDP Act 2023 Compliant  |  🚑 </a:t>
+            </a:r>
+            <a:r>
+              <a:rPr lang="en-US" sz="1100" b="1" dirty="0">
+                <a:solidFill>
+                  <a:srgbClr val="F59E0B"/>
+                </a:solidFill>
+                <a:latin typeface="Segoe UI"/>
+              </a:rPr>
+              <a:t>62</a:t>
+            </a:r>
+            <a:r>
+              <a:rPr sz="1100" b="1" dirty="0">
+                <a:solidFill>
+                  <a:srgbClr val="F59E0B"/>
+                </a:solidFill>
+                <a:latin typeface="Segoe UI"/>
+              </a:rPr>
+              <a:t>% Transit Time Reduction</a:t>
             </a:r>
           </a:p>
         </p:txBody>
@@ -3372,7 +3360,7 @@
 </file>
 
 <file path=ppt/slides/slide10.xml><?xml version="1.0" encoding="utf-8"?>
-<p:sld xmlns:a="http://schemas.openxmlformats.org/drawingml/2006/main" xmlns:p="http://schemas.openxmlformats.org/presentationml/2006/main" xmlns:r="http://schemas.openxmlformats.org/officeDocument/2006/relationships">
+<p:sld xmlns:a="http://schemas.openxmlformats.org/drawingml/2006/main" xmlns:r="http://schemas.openxmlformats.org/officeDocument/2006/relationships" xmlns:p="http://schemas.openxmlformats.org/presentationml/2006/main">
   <p:cSld>
     <p:spTree>
       <p:nvGrpSpPr>
@@ -3380,7 +3368,14 @@
         <p:cNvGrpSpPr/>
         <p:nvPr/>
       </p:nvGrpSpPr>
-      <p:grpSpPr/>
+      <p:grpSpPr>
+        <a:xfrm>
+          <a:off x="0" y="0"/>
+          <a:ext cx="0" cy="0"/>
+          <a:chOff x="0" y="0"/>
+          <a:chExt cx="0" cy="0"/>
+        </a:xfrm>
+      </p:grpSpPr>
       <p:sp>
         <p:nvSpPr>
           <p:cNvPr id="2" name="Rectangle 1"/>
@@ -3420,7 +3415,12 @@
           <a:bodyPr rtlCol="0" anchor="ctr"/>
           <a:lstStyle/>
           <a:p>
-            <a:pPr algn="ctr"/>
+            <a:pPr algn="ctr">
+              <a:lnSpc>
+                <a:spcPct val="150000"/>
+              </a:lnSpc>
+            </a:pPr>
+            <a:endParaRPr/>
           </a:p>
         </p:txBody>
       </p:sp>
@@ -3433,7 +3433,7 @@
         <p:spPr>
           <a:xfrm>
             <a:off x="731520" y="365760"/>
-            <a:ext cx="10698480" cy="365760"/>
+            <a:ext cx="10698480" cy="222369"/>
           </a:xfrm>
           <a:prstGeom prst="rect">
             <a:avLst/>
@@ -3441,11 +3441,16 @@
           <a:noFill/>
         </p:spPr>
         <p:txBody>
-          <a:bodyPr wrap="square" lIns="0" rIns="0" tIns="0" bIns="0">
+          <a:bodyPr wrap="square" lIns="0" tIns="0" rIns="0" bIns="0">
             <a:spAutoFit/>
           </a:bodyPr>
           <a:lstStyle/>
           <a:p>
+            <a:pPr>
+              <a:lnSpc>
+                <a:spcPct val="150000"/>
+              </a:lnSpc>
+            </a:pPr>
             <a:r>
               <a:rPr sz="1100" b="1">
                 <a:solidFill>
@@ -3467,7 +3472,7 @@
         <p:spPr>
           <a:xfrm>
             <a:off x="731520" y="640080"/>
-            <a:ext cx="10698480" cy="640080"/>
+            <a:ext cx="10698480" cy="444737"/>
           </a:xfrm>
           <a:prstGeom prst="rect">
             <a:avLst/>
@@ -3475,11 +3480,16 @@
           <a:noFill/>
         </p:spPr>
         <p:txBody>
-          <a:bodyPr wrap="square" lIns="0" rIns="0" tIns="0" bIns="0">
+          <a:bodyPr wrap="square" lIns="0" tIns="0" rIns="0" bIns="0">
             <a:spAutoFit/>
           </a:bodyPr>
           <a:lstStyle/>
           <a:p>
+            <a:pPr>
+              <a:lnSpc>
+                <a:spcPct val="150000"/>
+              </a:lnSpc>
+            </a:pPr>
             <a:r>
               <a:rPr sz="2200" b="1">
                 <a:solidFill>
@@ -3533,7 +3543,12 @@
           <a:bodyPr rtlCol="0" anchor="ctr"/>
           <a:lstStyle/>
           <a:p>
-            <a:pPr algn="ctr"/>
+            <a:pPr algn="ctr">
+              <a:lnSpc>
+                <a:spcPct val="150000"/>
+              </a:lnSpc>
+            </a:pPr>
+            <a:endParaRPr/>
           </a:p>
         </p:txBody>
       </p:sp>
@@ -3546,7 +3561,7 @@
         <p:spPr>
           <a:xfrm>
             <a:off x="914400" y="1417320"/>
-            <a:ext cx="4389120" cy="4937760"/>
+            <a:ext cx="4389120" cy="4622612"/>
           </a:xfrm>
           <a:prstGeom prst="rect">
             <a:avLst/>
@@ -3559,8 +3574,13 @@
           </a:bodyPr>
           <a:lstStyle/>
           <a:p>
-            <a:r>
-              <a:rPr sz="1200" b="1">
+            <a:pPr>
+              <a:lnSpc>
+                <a:spcPct val="150000"/>
+              </a:lnSpc>
+            </a:pPr>
+            <a:r>
+              <a:rPr sz="1200" b="1" dirty="0">
                 <a:solidFill>
                   <a:srgbClr val="A855F7"/>
                 </a:solidFill>
@@ -3571,17 +3591,40 @@
             </a:r>
           </a:p>
           <a:p>
-            <a:r>
-              <a:rPr sz="1050" b="1">
+            <a:pPr>
+              <a:lnSpc>
+                <a:spcPct val="150000"/>
+              </a:lnSpc>
+            </a:pPr>
+            <a:r>
+              <a:rPr sz="1050" b="1" dirty="0">
                 <a:solidFill>
                   <a:srgbClr val="38BDF8"/>
                 </a:solidFill>
                 <a:latin typeface="Segoe UI"/>
               </a:rPr>
-              <a:t>Real Authentication (JWT + Bcrypt): </a:t>
-            </a:r>
-            <a:r>
-              <a:rPr sz="1000" b="0">
+              <a:t>Real Authentication (JWT + </a:t>
+            </a:r>
+            <a:r>
+              <a:rPr sz="1050" b="1" dirty="0" err="1">
+                <a:solidFill>
+                  <a:srgbClr val="38BDF8"/>
+                </a:solidFill>
+                <a:latin typeface="Segoe UI"/>
+              </a:rPr>
+              <a:t>Bcrypt</a:t>
+            </a:r>
+            <a:r>
+              <a:rPr sz="1050" b="1" dirty="0">
+                <a:solidFill>
+                  <a:srgbClr val="38BDF8"/>
+                </a:solidFill>
+                <a:latin typeface="Segoe UI"/>
+              </a:rPr>
+              <a:t>): </a:t>
+            </a:r>
+            <a:r>
+              <a:rPr sz="1000" b="0" dirty="0">
                 <a:solidFill>
                   <a:srgbClr val="E2E8F0"/>
                 </a:solidFill>
@@ -3591,8 +3634,13 @@
             </a:r>
           </a:p>
           <a:p>
-            <a:r>
-              <a:rPr sz="1050" b="1">
+            <a:pPr>
+              <a:lnSpc>
+                <a:spcPct val="150000"/>
+              </a:lnSpc>
+            </a:pPr>
+            <a:r>
+              <a:rPr sz="1050" b="1" dirty="0">
                 <a:solidFill>
                   <a:srgbClr val="38BDF8"/>
                 </a:solidFill>
@@ -3601,7 +3649,7 @@
               <a:t>Role-Based Access Control (RBAC): </a:t>
             </a:r>
             <a:r>
-              <a:rPr sz="1000" b="0">
+              <a:rPr sz="1000" b="0" dirty="0">
                 <a:solidFill>
                   <a:srgbClr val="E2E8F0"/>
                 </a:solidFill>
@@ -3611,8 +3659,13 @@
             </a:r>
           </a:p>
           <a:p>
-            <a:r>
-              <a:rPr sz="1050" b="1">
+            <a:pPr>
+              <a:lnSpc>
+                <a:spcPct val="150000"/>
+              </a:lnSpc>
+            </a:pPr>
+            <a:r>
+              <a:rPr sz="1050" b="1" dirty="0">
                 <a:solidFill>
                   <a:srgbClr val="38BDF8"/>
                 </a:solidFill>
@@ -3621,7 +3674,7 @@
               <a:t>Mismatched Facility Enforcement (403): </a:t>
             </a:r>
             <a:r>
-              <a:rPr sz="1000" b="0">
+              <a:rPr sz="1000" b="0" dirty="0">
                 <a:solidFill>
                   <a:srgbClr val="E2E8F0"/>
                 </a:solidFill>
@@ -3631,8 +3684,13 @@
             </a:r>
           </a:p>
           <a:p>
-            <a:r>
-              <a:rPr sz="1050" b="1">
+            <a:pPr>
+              <a:lnSpc>
+                <a:spcPct val="150000"/>
+              </a:lnSpc>
+            </a:pPr>
+            <a:r>
+              <a:rPr sz="1050" b="1" dirty="0">
                 <a:solidFill>
                   <a:srgbClr val="38BDF8"/>
                 </a:solidFill>
@@ -3641,7 +3699,7 @@
               <a:t>Atomic Case Locking: </a:t>
             </a:r>
             <a:r>
-              <a:rPr sz="1000" b="0">
+              <a:rPr sz="1000" b="0" dirty="0">
                 <a:solidFill>
                   <a:srgbClr val="E2E8F0"/>
                 </a:solidFill>
@@ -3651,8 +3709,13 @@
             </a:r>
           </a:p>
           <a:p>
-            <a:r>
-              <a:rPr sz="1050" b="1">
+            <a:pPr>
+              <a:lnSpc>
+                <a:spcPct val="150000"/>
+              </a:lnSpc>
+            </a:pPr>
+            <a:r>
+              <a:rPr sz="1050" b="1" dirty="0">
                 <a:solidFill>
                   <a:srgbClr val="38BDF8"/>
                 </a:solidFill>
@@ -3661,7 +3724,7 @@
               <a:t>Trauma Bay 01 Pre-Armed: </a:t>
             </a:r>
             <a:r>
-              <a:rPr sz="1000" b="0">
+              <a:rPr sz="1000" b="0" dirty="0">
                 <a:solidFill>
                   <a:srgbClr val="E2E8F0"/>
                 </a:solidFill>
@@ -3671,8 +3734,13 @@
             </a:r>
           </a:p>
           <a:p>
-            <a:r>
-              <a:rPr sz="1050" b="1">
+            <a:pPr>
+              <a:lnSpc>
+                <a:spcPct val="150000"/>
+              </a:lnSpc>
+            </a:pPr>
+            <a:r>
+              <a:rPr sz="1050" b="1" dirty="0">
                 <a:solidFill>
                   <a:srgbClr val="38BDF8"/>
                 </a:solidFill>
@@ -3681,7 +3749,7 @@
               <a:t>Blood Bank Cross-Match Pre-Issued: </a:t>
             </a:r>
             <a:r>
-              <a:rPr sz="1000" b="0">
+              <a:rPr sz="1000" b="0" dirty="0">
                 <a:solidFill>
                   <a:srgbClr val="E2E8F0"/>
                 </a:solidFill>
@@ -3691,8 +3759,13 @@
             </a:r>
           </a:p>
           <a:p>
-            <a:r>
-              <a:rPr sz="1050" b="1">
+            <a:pPr>
+              <a:lnSpc>
+                <a:spcPct val="150000"/>
+              </a:lnSpc>
+            </a:pPr>
+            <a:r>
+              <a:rPr sz="1050" b="1" dirty="0">
                 <a:solidFill>
                   <a:srgbClr val="38BDF8"/>
                 </a:solidFill>
@@ -3701,7 +3774,7 @@
               <a:t>30-Second Auto-Escalation Engine: </a:t>
             </a:r>
             <a:r>
-              <a:rPr sz="1000" b="0">
+              <a:rPr sz="1000" b="0" dirty="0">
                 <a:solidFill>
                   <a:srgbClr val="E2E8F0"/>
                 </a:solidFill>
@@ -3777,7 +3850,12 @@
           <a:bodyPr rtlCol="0" anchor="ctr"/>
           <a:lstStyle/>
           <a:p>
-            <a:pPr algn="ctr"/>
+            <a:pPr algn="ctr">
+              <a:lnSpc>
+                <a:spcPct val="150000"/>
+              </a:lnSpc>
+            </a:pPr>
+            <a:endParaRPr/>
           </a:p>
         </p:txBody>
       </p:sp>
@@ -3790,7 +3868,7 @@
         <p:spPr>
           <a:xfrm>
             <a:off x="5806440" y="4846320"/>
-            <a:ext cx="5516575" cy="1554480"/>
+            <a:ext cx="5516575" cy="1264000"/>
           </a:xfrm>
           <a:prstGeom prst="rect">
             <a:avLst/>
@@ -3803,6 +3881,11 @@
           </a:bodyPr>
           <a:lstStyle/>
           <a:p>
+            <a:pPr>
+              <a:lnSpc>
+                <a:spcPct val="150000"/>
+              </a:lnSpc>
+            </a:pPr>
             <a:r>
               <a:rPr sz="1100" b="1">
                 <a:solidFill>
@@ -3815,6 +3898,11 @@
             </a:r>
           </a:p>
           <a:p>
+            <a:pPr>
+              <a:lnSpc>
+                <a:spcPct val="150000"/>
+              </a:lnSpc>
+            </a:pPr>
             <a:r>
               <a:rPr sz="1000" b="0">
                 <a:solidFill>
@@ -3836,7 +3924,7 @@
 </file>
 
 <file path=ppt/slides/slide11.xml><?xml version="1.0" encoding="utf-8"?>
-<p:sld xmlns:a="http://schemas.openxmlformats.org/drawingml/2006/main" xmlns:p="http://schemas.openxmlformats.org/presentationml/2006/main" xmlns:r="http://schemas.openxmlformats.org/officeDocument/2006/relationships">
+<p:sld xmlns:a="http://schemas.openxmlformats.org/drawingml/2006/main" xmlns:r="http://schemas.openxmlformats.org/officeDocument/2006/relationships" xmlns:p="http://schemas.openxmlformats.org/presentationml/2006/main">
   <p:cSld>
     <p:spTree>
       <p:nvGrpSpPr>
@@ -3844,7 +3932,14 @@
         <p:cNvGrpSpPr/>
         <p:nvPr/>
       </p:nvGrpSpPr>
-      <p:grpSpPr/>
+      <p:grpSpPr>
+        <a:xfrm>
+          <a:off x="0" y="0"/>
+          <a:ext cx="0" cy="0"/>
+          <a:chOff x="0" y="0"/>
+          <a:chExt cx="0" cy="0"/>
+        </a:xfrm>
+      </p:grpSpPr>
       <p:sp>
         <p:nvSpPr>
           <p:cNvPr id="2" name="Rectangle 1"/>
@@ -3885,6 +3980,7 @@
           <a:lstStyle/>
           <a:p>
             <a:pPr algn="ctr"/>
+            <a:endParaRPr/>
           </a:p>
         </p:txBody>
       </p:sp>
@@ -3905,7 +4001,7 @@
           <a:noFill/>
         </p:spPr>
         <p:txBody>
-          <a:bodyPr wrap="square" lIns="0" rIns="0" tIns="0" bIns="0">
+          <a:bodyPr wrap="square" lIns="0" tIns="0" rIns="0" bIns="0">
             <a:spAutoFit/>
           </a:bodyPr>
           <a:lstStyle/>
@@ -3939,7 +4035,7 @@
           <a:noFill/>
         </p:spPr>
         <p:txBody>
-          <a:bodyPr wrap="square" lIns="0" rIns="0" tIns="0" bIns="0">
+          <a:bodyPr wrap="square" lIns="0" tIns="0" rIns="0" bIns="0">
             <a:spAutoFit/>
           </a:bodyPr>
           <a:lstStyle/>
@@ -3998,6 +4094,7 @@
           <a:lstStyle/>
           <a:p>
             <a:pPr algn="ctr"/>
+            <a:endParaRPr/>
           </a:p>
         </p:txBody>
       </p:sp>
@@ -4158,6 +4255,7 @@
           <a:lstStyle/>
           <a:p>
             <a:pPr algn="ctr"/>
+            <a:endParaRPr/>
           </a:p>
         </p:txBody>
       </p:sp>
@@ -4285,7 +4383,7 @@
 </file>
 
 <file path=ppt/slides/slide12.xml><?xml version="1.0" encoding="utf-8"?>
-<p:sld xmlns:a="http://schemas.openxmlformats.org/drawingml/2006/main" xmlns:p="http://schemas.openxmlformats.org/presentationml/2006/main" xmlns:r="http://schemas.openxmlformats.org/officeDocument/2006/relationships">
+<p:sld xmlns:a="http://schemas.openxmlformats.org/drawingml/2006/main" xmlns:r="http://schemas.openxmlformats.org/officeDocument/2006/relationships" xmlns:p="http://schemas.openxmlformats.org/presentationml/2006/main">
   <p:cSld>
     <p:spTree>
       <p:nvGrpSpPr>
@@ -4293,7 +4391,14 @@
         <p:cNvGrpSpPr/>
         <p:nvPr/>
       </p:nvGrpSpPr>
-      <p:grpSpPr/>
+      <p:grpSpPr>
+        <a:xfrm>
+          <a:off x="0" y="0"/>
+          <a:ext cx="0" cy="0"/>
+          <a:chOff x="0" y="0"/>
+          <a:chExt cx="0" cy="0"/>
+        </a:xfrm>
+      </p:grpSpPr>
       <p:sp>
         <p:nvSpPr>
           <p:cNvPr id="2" name="Rectangle 1"/>
@@ -4334,6 +4439,7 @@
           <a:lstStyle/>
           <a:p>
             <a:pPr algn="ctr"/>
+            <a:endParaRPr/>
           </a:p>
         </p:txBody>
       </p:sp>
@@ -4354,7 +4460,7 @@
           <a:noFill/>
         </p:spPr>
         <p:txBody>
-          <a:bodyPr wrap="square" lIns="0" rIns="0" tIns="0" bIns="0">
+          <a:bodyPr wrap="square" lIns="0" tIns="0" rIns="0" bIns="0">
             <a:spAutoFit/>
           </a:bodyPr>
           <a:lstStyle/>
@@ -4388,7 +4494,7 @@
           <a:noFill/>
         </p:spPr>
         <p:txBody>
-          <a:bodyPr wrap="square" lIns="0" rIns="0" tIns="0" bIns="0">
+          <a:bodyPr wrap="square" lIns="0" tIns="0" rIns="0" bIns="0">
             <a:spAutoFit/>
           </a:bodyPr>
           <a:lstStyle/>
@@ -4447,6 +4553,7 @@
           <a:lstStyle/>
           <a:p>
             <a:pPr algn="ctr"/>
+            <a:endParaRPr/>
           </a:p>
         </p:txBody>
       </p:sp>
@@ -4467,13 +4574,13 @@
           <a:noFill/>
         </p:spPr>
         <p:txBody>
-          <a:bodyPr wrap="square" lIns="0" rIns="0" tIns="0" bIns="0">
+          <a:bodyPr wrap="square" lIns="0" tIns="0" rIns="0" bIns="0">
             <a:spAutoFit/>
           </a:bodyPr>
           <a:lstStyle/>
           <a:p>
             <a:r>
-              <a:rPr sz="900" b="1">
+              <a:rPr sz="900" b="1" dirty="0">
                 <a:solidFill>
                   <a:srgbClr val="94A3B8"/>
                 </a:solidFill>
@@ -4485,7 +4592,7 @@
           </a:p>
           <a:p>
             <a:r>
-              <a:rPr sz="1800" b="1">
+              <a:rPr sz="1800" b="1" dirty="0">
                 <a:solidFill>
                   <a:srgbClr val="EF4444"/>
                 </a:solidFill>
@@ -4497,7 +4604,7 @@
           </a:p>
           <a:p>
             <a:r>
-              <a:rPr sz="900" b="0">
+              <a:rPr sz="900" b="0" dirty="0">
                 <a:solidFill>
                   <a:srgbClr val="F8FAFC"/>
                 </a:solidFill>
@@ -4550,6 +4657,7 @@
           <a:lstStyle/>
           <a:p>
             <a:pPr algn="ctr"/>
+            <a:endParaRPr/>
           </a:p>
         </p:txBody>
       </p:sp>
@@ -4570,7 +4678,7 @@
           <a:noFill/>
         </p:spPr>
         <p:txBody>
-          <a:bodyPr wrap="square" lIns="0" rIns="0" tIns="0" bIns="0">
+          <a:bodyPr wrap="square" lIns="0" tIns="0" rIns="0" bIns="0">
             <a:spAutoFit/>
           </a:bodyPr>
           <a:lstStyle/>
@@ -4653,6 +4761,7 @@
           <a:lstStyle/>
           <a:p>
             <a:pPr algn="ctr"/>
+            <a:endParaRPr/>
           </a:p>
         </p:txBody>
       </p:sp>
@@ -4673,7 +4782,7 @@
           <a:noFill/>
         </p:spPr>
         <p:txBody>
-          <a:bodyPr wrap="square" lIns="0" rIns="0" tIns="0" bIns="0">
+          <a:bodyPr wrap="square" lIns="0" tIns="0" rIns="0" bIns="0">
             <a:spAutoFit/>
           </a:bodyPr>
           <a:lstStyle/>
@@ -4756,6 +4865,7 @@
           <a:lstStyle/>
           <a:p>
             <a:pPr algn="ctr"/>
+            <a:endParaRPr/>
           </a:p>
         </p:txBody>
       </p:sp>
@@ -4776,7 +4886,7 @@
           <a:noFill/>
         </p:spPr>
         <p:txBody>
-          <a:bodyPr wrap="square" lIns="0" rIns="0" tIns="0" bIns="0">
+          <a:bodyPr wrap="square" lIns="0" tIns="0" rIns="0" bIns="0">
             <a:spAutoFit/>
           </a:bodyPr>
           <a:lstStyle/>
@@ -4859,6 +4969,7 @@
           <a:lstStyle/>
           <a:p>
             <a:pPr algn="ctr"/>
+            <a:endParaRPr/>
           </a:p>
         </p:txBody>
       </p:sp>
@@ -4871,7 +4982,7 @@
         <p:spPr>
           <a:xfrm>
             <a:off x="1005840" y="3200400"/>
-            <a:ext cx="10149840" cy="3017520"/>
+            <a:ext cx="10149840" cy="2602828"/>
           </a:xfrm>
           <a:prstGeom prst="rect">
             <a:avLst/>
@@ -4884,6 +4995,11 @@
           </a:bodyPr>
           <a:lstStyle/>
           <a:p>
+            <a:pPr>
+              <a:lnSpc>
+                <a:spcPct val="150000"/>
+              </a:lnSpc>
+            </a:pPr>
             <a:r>
               <a:rPr sz="1300" b="1">
                 <a:solidFill>
@@ -4896,6 +5012,11 @@
             </a:r>
           </a:p>
           <a:p>
+            <a:pPr>
+              <a:lnSpc>
+                <a:spcPct val="150000"/>
+              </a:lnSpc>
+            </a:pPr>
             <a:r>
               <a:rPr sz="1100" b="1">
                 <a:solidFill>
@@ -4917,6 +5038,11 @@
             </a:r>
           </a:p>
           <a:p>
+            <a:pPr>
+              <a:lnSpc>
+                <a:spcPct val="150000"/>
+              </a:lnSpc>
+            </a:pPr>
             <a:r>
               <a:rPr sz="1100" b="1">
                 <a:solidFill>
@@ -4938,6 +5064,11 @@
             </a:r>
           </a:p>
           <a:p>
+            <a:pPr>
+              <a:lnSpc>
+                <a:spcPct val="150000"/>
+              </a:lnSpc>
+            </a:pPr>
             <a:r>
               <a:rPr sz="1100" b="1">
                 <a:solidFill>
@@ -4959,6 +5090,11 @@
             </a:r>
           </a:p>
           <a:p>
+            <a:pPr>
+              <a:lnSpc>
+                <a:spcPct val="150000"/>
+              </a:lnSpc>
+            </a:pPr>
             <a:r>
               <a:rPr sz="1100" b="1">
                 <a:solidFill>
@@ -4990,7 +5126,7 @@
 </file>
 
 <file path=ppt/slides/slide13.xml><?xml version="1.0" encoding="utf-8"?>
-<p:sld xmlns:a="http://schemas.openxmlformats.org/drawingml/2006/main" xmlns:p="http://schemas.openxmlformats.org/presentationml/2006/main" xmlns:r="http://schemas.openxmlformats.org/officeDocument/2006/relationships">
+<p:sld xmlns:a="http://schemas.openxmlformats.org/drawingml/2006/main" xmlns:r="http://schemas.openxmlformats.org/officeDocument/2006/relationships" xmlns:p="http://schemas.openxmlformats.org/presentationml/2006/main">
   <p:cSld>
     <p:spTree>
       <p:nvGrpSpPr>
@@ -4998,7 +5134,14 @@
         <p:cNvGrpSpPr/>
         <p:nvPr/>
       </p:nvGrpSpPr>
-      <p:grpSpPr/>
+      <p:grpSpPr>
+        <a:xfrm>
+          <a:off x="0" y="0"/>
+          <a:ext cx="0" cy="0"/>
+          <a:chOff x="0" y="0"/>
+          <a:chExt cx="0" cy="0"/>
+        </a:xfrm>
+      </p:grpSpPr>
       <p:sp>
         <p:nvSpPr>
           <p:cNvPr id="2" name="Rectangle 1"/>
@@ -5038,7 +5181,12 @@
           <a:bodyPr rtlCol="0" anchor="ctr"/>
           <a:lstStyle/>
           <a:p>
-            <a:pPr algn="ctr"/>
+            <a:pPr algn="ctr">
+              <a:lnSpc>
+                <a:spcPct val="150000"/>
+              </a:lnSpc>
+            </a:pPr>
+            <a:endParaRPr/>
           </a:p>
         </p:txBody>
       </p:sp>
@@ -5051,7 +5199,7 @@
         <p:spPr>
           <a:xfrm>
             <a:off x="731520" y="365760"/>
-            <a:ext cx="10698480" cy="365760"/>
+            <a:ext cx="10698480" cy="222369"/>
           </a:xfrm>
           <a:prstGeom prst="rect">
             <a:avLst/>
@@ -5059,11 +5207,16 @@
           <a:noFill/>
         </p:spPr>
         <p:txBody>
-          <a:bodyPr wrap="square" lIns="0" rIns="0" tIns="0" bIns="0">
+          <a:bodyPr wrap="square" lIns="0" tIns="0" rIns="0" bIns="0">
             <a:spAutoFit/>
           </a:bodyPr>
           <a:lstStyle/>
           <a:p>
+            <a:pPr>
+              <a:lnSpc>
+                <a:spcPct val="150000"/>
+              </a:lnSpc>
+            </a:pPr>
             <a:r>
               <a:rPr sz="1100" b="1">
                 <a:solidFill>
@@ -5085,7 +5238,7 @@
         <p:spPr>
           <a:xfrm>
             <a:off x="731520" y="640080"/>
-            <a:ext cx="10698480" cy="640080"/>
+            <a:ext cx="10698480" cy="444737"/>
           </a:xfrm>
           <a:prstGeom prst="rect">
             <a:avLst/>
@@ -5093,13 +5246,18 @@
           <a:noFill/>
         </p:spPr>
         <p:txBody>
-          <a:bodyPr wrap="square" lIns="0" rIns="0" tIns="0" bIns="0">
+          <a:bodyPr wrap="square" lIns="0" tIns="0" rIns="0" bIns="0">
             <a:spAutoFit/>
           </a:bodyPr>
           <a:lstStyle/>
           <a:p>
-            <a:r>
-              <a:rPr sz="2200" b="1">
+            <a:pPr>
+              <a:lnSpc>
+                <a:spcPct val="150000"/>
+              </a:lnSpc>
+            </a:pPr>
+            <a:r>
+              <a:rPr sz="2200" b="1" dirty="0">
                 <a:solidFill>
                   <a:srgbClr val="F8FAFC"/>
                 </a:solidFill>
@@ -5151,7 +5309,12 @@
           <a:bodyPr rtlCol="0" anchor="ctr"/>
           <a:lstStyle/>
           <a:p>
-            <a:pPr algn="ctr"/>
+            <a:pPr algn="ctr">
+              <a:lnSpc>
+                <a:spcPct val="150000"/>
+              </a:lnSpc>
+            </a:pPr>
+            <a:endParaRPr/>
           </a:p>
         </p:txBody>
       </p:sp>
@@ -5164,7 +5327,7 @@
         <p:spPr>
           <a:xfrm>
             <a:off x="914400" y="1554480"/>
-            <a:ext cx="4846320" cy="4663440"/>
+            <a:ext cx="4846320" cy="3526158"/>
           </a:xfrm>
           <a:prstGeom prst="rect">
             <a:avLst/>
@@ -5177,8 +5340,13 @@
           </a:bodyPr>
           <a:lstStyle/>
           <a:p>
-            <a:r>
-              <a:rPr sz="1300" b="1">
+            <a:pPr>
+              <a:lnSpc>
+                <a:spcPct val="150000"/>
+              </a:lnSpc>
+            </a:pPr>
+            <a:r>
+              <a:rPr sz="1300" b="1" dirty="0">
                 <a:solidFill>
                   <a:srgbClr val="10B981"/>
                 </a:solidFill>
@@ -5189,8 +5357,13 @@
             </a:r>
           </a:p>
           <a:p>
-            <a:r>
-              <a:rPr sz="1100" b="1">
+            <a:pPr>
+              <a:lnSpc>
+                <a:spcPct val="150000"/>
+              </a:lnSpc>
+            </a:pPr>
+            <a:r>
+              <a:rPr sz="1100" b="1" dirty="0">
                 <a:solidFill>
                   <a:srgbClr val="F8FAFC"/>
                 </a:solidFill>
@@ -5200,18 +5373,41 @@
 </a:t>
             </a:r>
             <a:r>
-              <a:rPr sz="1000" b="0">
+              <a:rPr sz="1000" b="0" dirty="0">
                 <a:solidFill>
                   <a:srgbClr val="94A3B8"/>
                 </a:solidFill>
                 <a:latin typeface="Segoe UI"/>
               </a:rPr>
-              <a:t>91-8842-9912-3401 (stevin.joseph@abdm) — Authenticated via Government of India ABDM Gateway.</a:t>
-            </a:r>
-          </a:p>
-          <a:p>
-            <a:r>
-              <a:rPr sz="1100" b="1">
+              <a:t>91-8842-9912-3401 (</a:t>
+            </a:r>
+            <a:r>
+              <a:rPr sz="1000" b="0" dirty="0" err="1">
+                <a:solidFill>
+                  <a:srgbClr val="94A3B8"/>
+                </a:solidFill>
+                <a:latin typeface="Segoe UI"/>
+              </a:rPr>
+              <a:t>stevin.joseph@abdm</a:t>
+            </a:r>
+            <a:r>
+              <a:rPr sz="1000" b="0" dirty="0">
+                <a:solidFill>
+                  <a:srgbClr val="94A3B8"/>
+                </a:solidFill>
+                <a:latin typeface="Segoe UI"/>
+              </a:rPr>
+              <a:t>) — Authenticated via Government of India ABDM Gateway.</a:t>
+            </a:r>
+          </a:p>
+          <a:p>
+            <a:pPr>
+              <a:lnSpc>
+                <a:spcPct val="150000"/>
+              </a:lnSpc>
+            </a:pPr>
+            <a:r>
+              <a:rPr sz="1100" b="1" dirty="0">
                 <a:solidFill>
                   <a:srgbClr val="F8FAFC"/>
                 </a:solidFill>
@@ -5221,7 +5417,7 @@
 </a:t>
             </a:r>
             <a:r>
-              <a:rPr sz="1000" b="0">
+              <a:rPr sz="1000" b="0" dirty="0">
                 <a:solidFill>
                   <a:srgbClr val="94A3B8"/>
                 </a:solidFill>
@@ -5231,8 +5427,13 @@
             </a:r>
           </a:p>
           <a:p>
-            <a:r>
-              <a:rPr sz="1100" b="1">
+            <a:pPr>
+              <a:lnSpc>
+                <a:spcPct val="150000"/>
+              </a:lnSpc>
+            </a:pPr>
+            <a:r>
+              <a:rPr sz="1100" b="1" dirty="0">
                 <a:solidFill>
                   <a:srgbClr val="F8FAFC"/>
                 </a:solidFill>
@@ -5242,7 +5443,7 @@
 </a:t>
             </a:r>
             <a:r>
-              <a:rPr sz="1000" b="0">
+              <a:rPr sz="1000" b="0" dirty="0">
                 <a:solidFill>
                   <a:srgbClr val="94A3B8"/>
                 </a:solidFill>
@@ -5252,8 +5453,13 @@
             </a:r>
           </a:p>
           <a:p>
-            <a:r>
-              <a:rPr sz="1100" b="1">
+            <a:pPr>
+              <a:lnSpc>
+                <a:spcPct val="150000"/>
+              </a:lnSpc>
+            </a:pPr>
+            <a:r>
+              <a:rPr sz="1100" b="1" dirty="0">
                 <a:solidFill>
                   <a:srgbClr val="F8FAFC"/>
                 </a:solidFill>
@@ -5263,13 +5469,31 @@
 </a:t>
             </a:r>
             <a:r>
-              <a:rPr sz="1000" b="0">
+              <a:rPr sz="1000" b="0" dirty="0">
                 <a:solidFill>
                   <a:srgbClr val="94A3B8"/>
                 </a:solidFill>
                 <a:latin typeface="Segoe UI"/>
               </a:rPr>
-              <a:t>Verified registration with the National Organ &amp; Tissue Transplant Organisation (NOTTO-IND-2024-88419).</a:t>
+              <a:t>Verified registration with the National Organ &amp; Tissue Transplant </a:t>
+            </a:r>
+            <a:r>
+              <a:rPr sz="1000" b="0" dirty="0" err="1">
+                <a:solidFill>
+                  <a:srgbClr val="94A3B8"/>
+                </a:solidFill>
+                <a:latin typeface="Segoe UI"/>
+              </a:rPr>
+              <a:t>Organisation</a:t>
+            </a:r>
+            <a:r>
+              <a:rPr sz="1000" b="0" dirty="0">
+                <a:solidFill>
+                  <a:srgbClr val="94A3B8"/>
+                </a:solidFill>
+                <a:latin typeface="Segoe UI"/>
+              </a:rPr>
+              <a:t> (NOTTO-IND-2024-88419).</a:t>
             </a:r>
           </a:p>
         </p:txBody>
@@ -5315,7 +5539,12 @@
           <a:bodyPr rtlCol="0" anchor="ctr"/>
           <a:lstStyle/>
           <a:p>
-            <a:pPr algn="ctr"/>
+            <a:pPr algn="ctr">
+              <a:lnSpc>
+                <a:spcPct val="150000"/>
+              </a:lnSpc>
+            </a:pPr>
+            <a:endParaRPr/>
           </a:p>
         </p:txBody>
       </p:sp>
@@ -5328,7 +5557,7 @@
         <p:spPr>
           <a:xfrm>
             <a:off x="6400800" y="1554480"/>
-            <a:ext cx="4846320" cy="4663440"/>
+            <a:ext cx="4846320" cy="3941656"/>
           </a:xfrm>
           <a:prstGeom prst="rect">
             <a:avLst/>
@@ -5341,6 +5570,11 @@
           </a:bodyPr>
           <a:lstStyle/>
           <a:p>
+            <a:pPr>
+              <a:lnSpc>
+                <a:spcPct val="150000"/>
+              </a:lnSpc>
+            </a:pPr>
             <a:r>
               <a:rPr sz="1300" b="1">
                 <a:solidFill>
@@ -5353,6 +5587,11 @@
             </a:r>
           </a:p>
           <a:p>
+            <a:pPr>
+              <a:lnSpc>
+                <a:spcPct val="150000"/>
+              </a:lnSpc>
+            </a:pPr>
             <a:r>
               <a:rPr sz="1050" b="1">
                 <a:solidFill>
@@ -5375,6 +5614,11 @@
             </a:r>
           </a:p>
           <a:p>
+            <a:pPr>
+              <a:lnSpc>
+                <a:spcPct val="150000"/>
+              </a:lnSpc>
+            </a:pPr>
             <a:r>
               <a:rPr sz="1050" b="1">
                 <a:solidFill>
@@ -5397,6 +5641,11 @@
             </a:r>
           </a:p>
           <a:p>
+            <a:pPr>
+              <a:lnSpc>
+                <a:spcPct val="150000"/>
+              </a:lnSpc>
+            </a:pPr>
             <a:r>
               <a:rPr sz="1050" b="1">
                 <a:solidFill>
@@ -5418,6 +5667,11 @@
             </a:r>
           </a:p>
           <a:p>
+            <a:pPr>
+              <a:lnSpc>
+                <a:spcPct val="150000"/>
+              </a:lnSpc>
+            </a:pPr>
             <a:r>
               <a:rPr sz="1050" b="1">
                 <a:solidFill>
@@ -5449,7 +5703,7 @@
 </file>
 
 <file path=ppt/slides/slide14.xml><?xml version="1.0" encoding="utf-8"?>
-<p:sld xmlns:a="http://schemas.openxmlformats.org/drawingml/2006/main" xmlns:p="http://schemas.openxmlformats.org/presentationml/2006/main" xmlns:r="http://schemas.openxmlformats.org/officeDocument/2006/relationships">
+<p:sld xmlns:a="http://schemas.openxmlformats.org/drawingml/2006/main" xmlns:r="http://schemas.openxmlformats.org/officeDocument/2006/relationships" xmlns:p="http://schemas.openxmlformats.org/presentationml/2006/main">
   <p:cSld>
     <p:spTree>
       <p:nvGrpSpPr>
@@ -5457,7 +5711,14 @@
         <p:cNvGrpSpPr/>
         <p:nvPr/>
       </p:nvGrpSpPr>
-      <p:grpSpPr/>
+      <p:grpSpPr>
+        <a:xfrm>
+          <a:off x="0" y="0"/>
+          <a:ext cx="0" cy="0"/>
+          <a:chOff x="0" y="0"/>
+          <a:chExt cx="0" cy="0"/>
+        </a:xfrm>
+      </p:grpSpPr>
       <p:sp>
         <p:nvSpPr>
           <p:cNvPr id="2" name="Rectangle 1"/>
@@ -5497,7 +5758,12 @@
           <a:bodyPr rtlCol="0" anchor="ctr"/>
           <a:lstStyle/>
           <a:p>
-            <a:pPr algn="ctr"/>
+            <a:pPr algn="ctr">
+              <a:lnSpc>
+                <a:spcPct val="150000"/>
+              </a:lnSpc>
+            </a:pPr>
+            <a:endParaRPr/>
           </a:p>
         </p:txBody>
       </p:sp>
@@ -5510,7 +5776,7 @@
         <p:spPr>
           <a:xfrm>
             <a:off x="731520" y="365760"/>
-            <a:ext cx="10698480" cy="365760"/>
+            <a:ext cx="10698480" cy="222369"/>
           </a:xfrm>
           <a:prstGeom prst="rect">
             <a:avLst/>
@@ -5518,11 +5784,16 @@
           <a:noFill/>
         </p:spPr>
         <p:txBody>
-          <a:bodyPr wrap="square" lIns="0" rIns="0" tIns="0" bIns="0">
+          <a:bodyPr wrap="square" lIns="0" tIns="0" rIns="0" bIns="0">
             <a:spAutoFit/>
           </a:bodyPr>
           <a:lstStyle/>
           <a:p>
+            <a:pPr>
+              <a:lnSpc>
+                <a:spcPct val="150000"/>
+              </a:lnSpc>
+            </a:pPr>
             <a:r>
               <a:rPr sz="1100" b="1">
                 <a:solidFill>
@@ -5544,7 +5815,7 @@
         <p:spPr>
           <a:xfrm>
             <a:off x="731520" y="640080"/>
-            <a:ext cx="10698480" cy="640080"/>
+            <a:ext cx="10698480" cy="444737"/>
           </a:xfrm>
           <a:prstGeom prst="rect">
             <a:avLst/>
@@ -5552,11 +5823,16 @@
           <a:noFill/>
         </p:spPr>
         <p:txBody>
-          <a:bodyPr wrap="square" lIns="0" rIns="0" tIns="0" bIns="0">
+          <a:bodyPr wrap="square" lIns="0" tIns="0" rIns="0" bIns="0">
             <a:spAutoFit/>
           </a:bodyPr>
           <a:lstStyle/>
           <a:p>
+            <a:pPr>
+              <a:lnSpc>
+                <a:spcPct val="150000"/>
+              </a:lnSpc>
+            </a:pPr>
             <a:r>
               <a:rPr sz="2200" b="1">
                 <a:solidFill>
@@ -5610,7 +5886,12 @@
           <a:bodyPr rtlCol="0" anchor="ctr"/>
           <a:lstStyle/>
           <a:p>
-            <a:pPr algn="ctr"/>
+            <a:pPr algn="ctr">
+              <a:lnSpc>
+                <a:spcPct val="150000"/>
+              </a:lnSpc>
+            </a:pPr>
+            <a:endParaRPr/>
           </a:p>
         </p:txBody>
       </p:sp>
@@ -5623,7 +5904,7 @@
         <p:spPr>
           <a:xfrm>
             <a:off x="868680" y="1554480"/>
-            <a:ext cx="2286000" cy="4663440"/>
+            <a:ext cx="2286000" cy="2520562"/>
           </a:xfrm>
           <a:prstGeom prst="rect">
             <a:avLst/>
@@ -5636,6 +5917,11 @@
           </a:bodyPr>
           <a:lstStyle/>
           <a:p>
+            <a:pPr>
+              <a:lnSpc>
+                <a:spcPct val="150000"/>
+              </a:lnSpc>
+            </a:pPr>
             <a:r>
               <a:rPr sz="1200" b="1">
                 <a:solidFill>
@@ -5647,6 +5933,11 @@
             </a:r>
           </a:p>
           <a:p>
+            <a:pPr>
+              <a:lnSpc>
+                <a:spcPct val="150000"/>
+              </a:lnSpc>
+            </a:pPr>
             <a:r>
               <a:rPr sz="1050" b="0">
                 <a:solidFill>
@@ -5704,7 +5995,12 @@
           <a:bodyPr rtlCol="0" anchor="ctr"/>
           <a:lstStyle/>
           <a:p>
-            <a:pPr algn="ctr"/>
+            <a:pPr algn="ctr">
+              <a:lnSpc>
+                <a:spcPct val="150000"/>
+              </a:lnSpc>
+            </a:pPr>
+            <a:endParaRPr/>
           </a:p>
         </p:txBody>
       </p:sp>
@@ -5717,7 +6013,7 @@
         <p:spPr>
           <a:xfrm>
             <a:off x="3593592" y="1554480"/>
-            <a:ext cx="2286000" cy="4663440"/>
+            <a:ext cx="2286000" cy="2312813"/>
           </a:xfrm>
           <a:prstGeom prst="rect">
             <a:avLst/>
@@ -5730,6 +6026,11 @@
           </a:bodyPr>
           <a:lstStyle/>
           <a:p>
+            <a:pPr>
+              <a:lnSpc>
+                <a:spcPct val="150000"/>
+              </a:lnSpc>
+            </a:pPr>
             <a:r>
               <a:rPr sz="1200" b="1">
                 <a:solidFill>
@@ -5741,6 +6042,11 @@
             </a:r>
           </a:p>
           <a:p>
+            <a:pPr>
+              <a:lnSpc>
+                <a:spcPct val="150000"/>
+              </a:lnSpc>
+            </a:pPr>
             <a:r>
               <a:rPr sz="1050" b="0">
                 <a:solidFill>
@@ -5798,7 +6104,12 @@
           <a:bodyPr rtlCol="0" anchor="ctr"/>
           <a:lstStyle/>
           <a:p>
-            <a:pPr algn="ctr"/>
+            <a:pPr algn="ctr">
+              <a:lnSpc>
+                <a:spcPct val="150000"/>
+              </a:lnSpc>
+            </a:pPr>
+            <a:endParaRPr/>
           </a:p>
         </p:txBody>
       </p:sp>
@@ -5811,7 +6122,7 @@
         <p:spPr>
           <a:xfrm>
             <a:off x="6318504" y="1554480"/>
-            <a:ext cx="2286000" cy="4663440"/>
+            <a:ext cx="2286000" cy="2312813"/>
           </a:xfrm>
           <a:prstGeom prst="rect">
             <a:avLst/>
@@ -5824,6 +6135,11 @@
           </a:bodyPr>
           <a:lstStyle/>
           <a:p>
+            <a:pPr>
+              <a:lnSpc>
+                <a:spcPct val="150000"/>
+              </a:lnSpc>
+            </a:pPr>
             <a:r>
               <a:rPr sz="1200" b="1">
                 <a:solidFill>
@@ -5835,6 +6151,11 @@
             </a:r>
           </a:p>
           <a:p>
+            <a:pPr>
+              <a:lnSpc>
+                <a:spcPct val="150000"/>
+              </a:lnSpc>
+            </a:pPr>
             <a:r>
               <a:rPr sz="1050" b="0">
                 <a:solidFill>
@@ -5892,7 +6213,12 @@
           <a:bodyPr rtlCol="0" anchor="ctr"/>
           <a:lstStyle/>
           <a:p>
-            <a:pPr algn="ctr"/>
+            <a:pPr algn="ctr">
+              <a:lnSpc>
+                <a:spcPct val="150000"/>
+              </a:lnSpc>
+            </a:pPr>
+            <a:endParaRPr/>
           </a:p>
         </p:txBody>
       </p:sp>
@@ -5905,7 +6231,7 @@
         <p:spPr>
           <a:xfrm>
             <a:off x="9043416" y="1554480"/>
-            <a:ext cx="2286000" cy="4663440"/>
+            <a:ext cx="2286000" cy="2312813"/>
           </a:xfrm>
           <a:prstGeom prst="rect">
             <a:avLst/>
@@ -5918,6 +6244,11 @@
           </a:bodyPr>
           <a:lstStyle/>
           <a:p>
+            <a:pPr>
+              <a:lnSpc>
+                <a:spcPct val="150000"/>
+              </a:lnSpc>
+            </a:pPr>
             <a:r>
               <a:rPr sz="1200" b="1">
                 <a:solidFill>
@@ -5929,6 +6260,11 @@
             </a:r>
           </a:p>
           <a:p>
+            <a:pPr>
+              <a:lnSpc>
+                <a:spcPct val="150000"/>
+              </a:lnSpc>
+            </a:pPr>
             <a:r>
               <a:rPr sz="1050" b="0">
                 <a:solidFill>
@@ -5954,7 +6290,7 @@
 </file>
 
 <file path=ppt/slides/slide15.xml><?xml version="1.0" encoding="utf-8"?>
-<p:sld xmlns:a="http://schemas.openxmlformats.org/drawingml/2006/main" xmlns:p="http://schemas.openxmlformats.org/presentationml/2006/main" xmlns:r="http://schemas.openxmlformats.org/officeDocument/2006/relationships">
+<p:sld xmlns:a="http://schemas.openxmlformats.org/drawingml/2006/main" xmlns:r="http://schemas.openxmlformats.org/officeDocument/2006/relationships" xmlns:p="http://schemas.openxmlformats.org/presentationml/2006/main">
   <p:cSld>
     <p:spTree>
       <p:nvGrpSpPr>
@@ -5962,7 +6298,14 @@
         <p:cNvGrpSpPr/>
         <p:nvPr/>
       </p:nvGrpSpPr>
-      <p:grpSpPr/>
+      <p:grpSpPr>
+        <a:xfrm>
+          <a:off x="0" y="0"/>
+          <a:ext cx="0" cy="0"/>
+          <a:chOff x="0" y="0"/>
+          <a:chExt cx="0" cy="0"/>
+        </a:xfrm>
+      </p:grpSpPr>
       <p:sp>
         <p:nvSpPr>
           <p:cNvPr id="2" name="Rectangle 1"/>
@@ -6002,7 +6345,12 @@
           <a:bodyPr rtlCol="0" anchor="ctr"/>
           <a:lstStyle/>
           <a:p>
-            <a:pPr algn="ctr"/>
+            <a:pPr algn="ctr">
+              <a:lnSpc>
+                <a:spcPct val="150000"/>
+              </a:lnSpc>
+            </a:pPr>
+            <a:endParaRPr/>
           </a:p>
         </p:txBody>
       </p:sp>
@@ -6015,7 +6363,7 @@
         <p:spPr>
           <a:xfrm>
             <a:off x="731520" y="365760"/>
-            <a:ext cx="10698480" cy="365760"/>
+            <a:ext cx="10698480" cy="222369"/>
           </a:xfrm>
           <a:prstGeom prst="rect">
             <a:avLst/>
@@ -6023,11 +6371,16 @@
           <a:noFill/>
         </p:spPr>
         <p:txBody>
-          <a:bodyPr wrap="square" lIns="0" rIns="0" tIns="0" bIns="0">
+          <a:bodyPr wrap="square" lIns="0" tIns="0" rIns="0" bIns="0">
             <a:spAutoFit/>
           </a:bodyPr>
           <a:lstStyle/>
           <a:p>
+            <a:pPr>
+              <a:lnSpc>
+                <a:spcPct val="150000"/>
+              </a:lnSpc>
+            </a:pPr>
             <a:r>
               <a:rPr sz="1100" b="1">
                 <a:solidFill>
@@ -6049,7 +6402,7 @@
         <p:spPr>
           <a:xfrm>
             <a:off x="731520" y="640080"/>
-            <a:ext cx="10698480" cy="640080"/>
+            <a:ext cx="10698480" cy="444737"/>
           </a:xfrm>
           <a:prstGeom prst="rect">
             <a:avLst/>
@@ -6057,11 +6410,16 @@
           <a:noFill/>
         </p:spPr>
         <p:txBody>
-          <a:bodyPr wrap="square" lIns="0" rIns="0" tIns="0" bIns="0">
+          <a:bodyPr wrap="square" lIns="0" tIns="0" rIns="0" bIns="0">
             <a:spAutoFit/>
           </a:bodyPr>
           <a:lstStyle/>
           <a:p>
+            <a:pPr>
+              <a:lnSpc>
+                <a:spcPct val="150000"/>
+              </a:lnSpc>
+            </a:pPr>
             <a:r>
               <a:rPr sz="2200" b="1">
                 <a:solidFill>
@@ -6115,7 +6473,12 @@
           <a:bodyPr rtlCol="0" anchor="ctr"/>
           <a:lstStyle/>
           <a:p>
-            <a:pPr algn="ctr"/>
+            <a:pPr algn="ctr">
+              <a:lnSpc>
+                <a:spcPct val="150000"/>
+              </a:lnSpc>
+            </a:pPr>
+            <a:endParaRPr/>
           </a:p>
         </p:txBody>
       </p:sp>
@@ -6128,7 +6491,7 @@
         <p:spPr>
           <a:xfrm>
             <a:off x="914400" y="1554480"/>
-            <a:ext cx="4846320" cy="4663440"/>
+            <a:ext cx="4846320" cy="3041410"/>
           </a:xfrm>
           <a:prstGeom prst="rect">
             <a:avLst/>
@@ -6141,6 +6504,11 @@
           </a:bodyPr>
           <a:lstStyle/>
           <a:p>
+            <a:pPr>
+              <a:lnSpc>
+                <a:spcPct val="150000"/>
+              </a:lnSpc>
+            </a:pPr>
             <a:r>
               <a:rPr sz="1300" b="1">
                 <a:solidFill>
@@ -6153,6 +6521,11 @@
             </a:r>
           </a:p>
           <a:p>
+            <a:pPr>
+              <a:lnSpc>
+                <a:spcPct val="150000"/>
+              </a:lnSpc>
+            </a:pPr>
             <a:r>
               <a:rPr sz="1100" b="1">
                 <a:solidFill>
@@ -6174,6 +6547,11 @@
             </a:r>
           </a:p>
           <a:p>
+            <a:pPr>
+              <a:lnSpc>
+                <a:spcPct val="150000"/>
+              </a:lnSpc>
+            </a:pPr>
             <a:r>
               <a:rPr sz="1100" b="1">
                 <a:solidFill>
@@ -6195,6 +6573,11 @@
             </a:r>
           </a:p>
           <a:p>
+            <a:pPr>
+              <a:lnSpc>
+                <a:spcPct val="150000"/>
+              </a:lnSpc>
+            </a:pPr>
             <a:r>
               <a:rPr sz="1100" b="1">
                 <a:solidFill>
@@ -6258,7 +6641,12 @@
           <a:bodyPr rtlCol="0" anchor="ctr"/>
           <a:lstStyle/>
           <a:p>
-            <a:pPr algn="ctr"/>
+            <a:pPr algn="ctr">
+              <a:lnSpc>
+                <a:spcPct val="150000"/>
+              </a:lnSpc>
+            </a:pPr>
+            <a:endParaRPr/>
           </a:p>
         </p:txBody>
       </p:sp>
@@ -6271,7 +6659,7 @@
         <p:spPr>
           <a:xfrm>
             <a:off x="6400800" y="1554480"/>
-            <a:ext cx="4846320" cy="4663440"/>
+            <a:ext cx="4846320" cy="3526158"/>
           </a:xfrm>
           <a:prstGeom prst="rect">
             <a:avLst/>
@@ -6284,6 +6672,11 @@
           </a:bodyPr>
           <a:lstStyle/>
           <a:p>
+            <a:pPr>
+              <a:lnSpc>
+                <a:spcPct val="150000"/>
+              </a:lnSpc>
+            </a:pPr>
             <a:r>
               <a:rPr sz="1300" b="1">
                 <a:solidFill>
@@ -6296,6 +6689,11 @@
             </a:r>
           </a:p>
           <a:p>
+            <a:pPr>
+              <a:lnSpc>
+                <a:spcPct val="150000"/>
+              </a:lnSpc>
+            </a:pPr>
             <a:r>
               <a:rPr sz="1100" b="1">
                 <a:solidFill>
@@ -6317,6 +6715,11 @@
             </a:r>
           </a:p>
           <a:p>
+            <a:pPr>
+              <a:lnSpc>
+                <a:spcPct val="150000"/>
+              </a:lnSpc>
+            </a:pPr>
             <a:r>
               <a:rPr sz="1100" b="1">
                 <a:solidFill>
@@ -6338,6 +6741,11 @@
             </a:r>
           </a:p>
           <a:p>
+            <a:pPr>
+              <a:lnSpc>
+                <a:spcPct val="150000"/>
+              </a:lnSpc>
+            </a:pPr>
             <a:r>
               <a:rPr sz="1100" b="1">
                 <a:solidFill>
@@ -6359,6 +6767,11 @@
             </a:r>
           </a:p>
           <a:p>
+            <a:pPr>
+              <a:lnSpc>
+                <a:spcPct val="150000"/>
+              </a:lnSpc>
+            </a:pPr>
             <a:r>
               <a:rPr sz="1100" b="1">
                 <a:solidFill>
@@ -6390,7 +6803,7 @@
 </file>
 
 <file path=ppt/slides/slide16.xml><?xml version="1.0" encoding="utf-8"?>
-<p:sld xmlns:a="http://schemas.openxmlformats.org/drawingml/2006/main" xmlns:p="http://schemas.openxmlformats.org/presentationml/2006/main" xmlns:r="http://schemas.openxmlformats.org/officeDocument/2006/relationships">
+<p:sld xmlns:a="http://schemas.openxmlformats.org/drawingml/2006/main" xmlns:r="http://schemas.openxmlformats.org/officeDocument/2006/relationships" xmlns:p="http://schemas.openxmlformats.org/presentationml/2006/main">
   <p:cSld>
     <p:spTree>
       <p:nvGrpSpPr>
@@ -6398,7 +6811,14 @@
         <p:cNvGrpSpPr/>
         <p:nvPr/>
       </p:nvGrpSpPr>
-      <p:grpSpPr/>
+      <p:grpSpPr>
+        <a:xfrm>
+          <a:off x="0" y="0"/>
+          <a:ext cx="0" cy="0"/>
+          <a:chOff x="0" y="0"/>
+          <a:chExt cx="0" cy="0"/>
+        </a:xfrm>
+      </p:grpSpPr>
       <p:sp>
         <p:nvSpPr>
           <p:cNvPr id="2" name="Rectangle 1"/>
@@ -6439,6 +6859,7 @@
           <a:lstStyle/>
           <a:p>
             <a:pPr algn="ctr"/>
+            <a:endParaRPr/>
           </a:p>
         </p:txBody>
       </p:sp>
@@ -6459,7 +6880,7 @@
           <a:noFill/>
         </p:spPr>
         <p:txBody>
-          <a:bodyPr wrap="square" lIns="0" rIns="0" tIns="0" bIns="0">
+          <a:bodyPr wrap="square" lIns="0" tIns="0" rIns="0" bIns="0">
             <a:spAutoFit/>
           </a:bodyPr>
           <a:lstStyle/>
@@ -6493,7 +6914,7 @@
           <a:noFill/>
         </p:spPr>
         <p:txBody>
-          <a:bodyPr wrap="square" lIns="0" rIns="0" tIns="0" bIns="0">
+          <a:bodyPr wrap="square" lIns="0" tIns="0" rIns="0" bIns="0">
             <a:spAutoFit/>
           </a:bodyPr>
           <a:lstStyle/>
@@ -6552,6 +6973,7 @@
           <a:lstStyle/>
           <a:p>
             <a:pPr algn="ctr"/>
+            <a:endParaRPr/>
           </a:p>
         </p:txBody>
       </p:sp>
@@ -6645,6 +7067,7 @@
           <a:lstStyle/>
           <a:p>
             <a:pPr algn="ctr"/>
+            <a:endParaRPr/>
           </a:p>
         </p:txBody>
       </p:sp>
@@ -6738,6 +7161,7 @@
           <a:lstStyle/>
           <a:p>
             <a:pPr algn="ctr"/>
+            <a:endParaRPr/>
           </a:p>
         </p:txBody>
       </p:sp>
@@ -6831,6 +7255,7 @@
           <a:lstStyle/>
           <a:p>
             <a:pPr algn="ctr"/>
+            <a:endParaRPr/>
           </a:p>
         </p:txBody>
       </p:sp>
@@ -6889,7 +7314,7 @@
 </file>
 
 <file path=ppt/slides/slide17.xml><?xml version="1.0" encoding="utf-8"?>
-<p:sld xmlns:a="http://schemas.openxmlformats.org/drawingml/2006/main" xmlns:p="http://schemas.openxmlformats.org/presentationml/2006/main" xmlns:r="http://schemas.openxmlformats.org/officeDocument/2006/relationships">
+<p:sld xmlns:a="http://schemas.openxmlformats.org/drawingml/2006/main" xmlns:r="http://schemas.openxmlformats.org/officeDocument/2006/relationships" xmlns:p="http://schemas.openxmlformats.org/presentationml/2006/main">
   <p:cSld>
     <p:spTree>
       <p:nvGrpSpPr>
@@ -6897,7 +7322,14 @@
         <p:cNvGrpSpPr/>
         <p:nvPr/>
       </p:nvGrpSpPr>
-      <p:grpSpPr/>
+      <p:grpSpPr>
+        <a:xfrm>
+          <a:off x="0" y="0"/>
+          <a:ext cx="0" cy="0"/>
+          <a:chOff x="0" y="0"/>
+          <a:chExt cx="0" cy="0"/>
+        </a:xfrm>
+      </p:grpSpPr>
       <p:sp>
         <p:nvSpPr>
           <p:cNvPr id="2" name="Rectangle 1"/>
@@ -6937,7 +7369,12 @@
           <a:bodyPr rtlCol="0" anchor="ctr"/>
           <a:lstStyle/>
           <a:p>
-            <a:pPr algn="ctr"/>
+            <a:pPr algn="ctr">
+              <a:lnSpc>
+                <a:spcPct val="150000"/>
+              </a:lnSpc>
+            </a:pPr>
+            <a:endParaRPr/>
           </a:p>
         </p:txBody>
       </p:sp>
@@ -6950,7 +7387,7 @@
         <p:spPr>
           <a:xfrm>
             <a:off x="731520" y="365760"/>
-            <a:ext cx="10698480" cy="365760"/>
+            <a:ext cx="10698480" cy="222369"/>
           </a:xfrm>
           <a:prstGeom prst="rect">
             <a:avLst/>
@@ -6958,11 +7395,16 @@
           <a:noFill/>
         </p:spPr>
         <p:txBody>
-          <a:bodyPr wrap="square" lIns="0" rIns="0" tIns="0" bIns="0">
+          <a:bodyPr wrap="square" lIns="0" tIns="0" rIns="0" bIns="0">
             <a:spAutoFit/>
           </a:bodyPr>
           <a:lstStyle/>
           <a:p>
+            <a:pPr>
+              <a:lnSpc>
+                <a:spcPct val="150000"/>
+              </a:lnSpc>
+            </a:pPr>
             <a:r>
               <a:rPr sz="1100" b="1">
                 <a:solidFill>
@@ -6984,7 +7426,7 @@
         <p:spPr>
           <a:xfrm>
             <a:off x="731520" y="640080"/>
-            <a:ext cx="10698480" cy="640080"/>
+            <a:ext cx="10698480" cy="444737"/>
           </a:xfrm>
           <a:prstGeom prst="rect">
             <a:avLst/>
@@ -6992,11 +7434,16 @@
           <a:noFill/>
         </p:spPr>
         <p:txBody>
-          <a:bodyPr wrap="square" lIns="0" rIns="0" tIns="0" bIns="0">
+          <a:bodyPr wrap="square" lIns="0" tIns="0" rIns="0" bIns="0">
             <a:spAutoFit/>
           </a:bodyPr>
           <a:lstStyle/>
           <a:p>
+            <a:pPr>
+              <a:lnSpc>
+                <a:spcPct val="150000"/>
+              </a:lnSpc>
+            </a:pPr>
             <a:r>
               <a:rPr sz="2200" b="1">
                 <a:solidFill>
@@ -7050,7 +7497,12 @@
           <a:bodyPr rtlCol="0" anchor="ctr"/>
           <a:lstStyle/>
           <a:p>
-            <a:pPr algn="ctr"/>
+            <a:pPr algn="ctr">
+              <a:lnSpc>
+                <a:spcPct val="150000"/>
+              </a:lnSpc>
+            </a:pPr>
+            <a:endParaRPr/>
           </a:p>
         </p:txBody>
       </p:sp>
@@ -7063,7 +7515,7 @@
         <p:spPr>
           <a:xfrm>
             <a:off x="1005840" y="1554480"/>
-            <a:ext cx="10149840" cy="4663440"/>
+            <a:ext cx="10149840" cy="3756991"/>
           </a:xfrm>
           <a:prstGeom prst="rect">
             <a:avLst/>
@@ -7076,8 +7528,13 @@
           </a:bodyPr>
           <a:lstStyle/>
           <a:p>
-            <a:r>
-              <a:rPr sz="1000" b="1">
+            <a:pPr>
+              <a:lnSpc>
+                <a:spcPct val="150000"/>
+              </a:lnSpc>
+            </a:pPr>
+            <a:r>
+              <a:rPr sz="1000" b="1" dirty="0">
                 <a:solidFill>
                   <a:srgbClr val="38BDF8"/>
                 </a:solidFill>
@@ -7088,8 +7545,13 @@
             </a:r>
           </a:p>
           <a:p>
-            <a:r>
-              <a:rPr sz="1000" b="1">
+            <a:pPr>
+              <a:lnSpc>
+                <a:spcPct val="150000"/>
+              </a:lnSpc>
+            </a:pPr>
+            <a:r>
+              <a:rPr sz="1000" b="1" dirty="0">
                 <a:solidFill>
                   <a:srgbClr val="F8FAFC"/>
                 </a:solidFill>
@@ -7098,7 +7560,7 @@
               <a:t>• Crash Detection Time       : </a:t>
             </a:r>
             <a:r>
-              <a:rPr sz="950" b="0">
+              <a:rPr sz="950" b="0" dirty="0">
                 <a:solidFill>
                   <a:srgbClr val="94A3B8"/>
                 </a:solidFill>
@@ -7107,19 +7569,60 @@
               <a:t>Manual Bystander Call (10-15 min)  |  Voice Call + Triangulation (8-12 min)  ➔  </a:t>
             </a:r>
             <a:r>
-              <a:rPr sz="1000" b="1">
+              <a:rPr sz="1000" b="1" dirty="0">
                 <a:solidFill>
                   <a:srgbClr val="10B981"/>
                 </a:solidFill>
                 <a:latin typeface="Segoe UI"/>
               </a:rPr>
-              <a:t>18.2 ms Autonomous On-Device TFLite
+              <a:t>18.2 </a:t>
+            </a:r>
+            <a:r>
+              <a:rPr sz="1000" b="1" dirty="0" err="1">
+                <a:solidFill>
+                  <a:srgbClr val="10B981"/>
+                </a:solidFill>
+                <a:latin typeface="Segoe UI"/>
+              </a:rPr>
+              <a:t>ms</a:t>
+            </a:r>
+            <a:r>
+              <a:rPr sz="1000" b="1" dirty="0">
+                <a:solidFill>
+                  <a:srgbClr val="10B981"/>
+                </a:solidFill>
+                <a:latin typeface="Segoe UI"/>
+              </a:rPr>
+              <a:t> Autonomous On-Device </a:t>
+            </a:r>
+            <a:r>
+              <a:rPr sz="1000" b="1" dirty="0" err="1">
+                <a:solidFill>
+                  <a:srgbClr val="10B981"/>
+                </a:solidFill>
+                <a:latin typeface="Segoe UI"/>
+              </a:rPr>
+              <a:t>TFLite</a:t>
+            </a:r>
+            <a:r>
+              <a:rPr sz="1000" b="1" dirty="0">
+                <a:solidFill>
+                  <a:srgbClr val="10B981"/>
+                </a:solidFill>
+                <a:latin typeface="Segoe UI"/>
+              </a:rPr>
+              <a:t>
 </a:t>
             </a:r>
           </a:p>
           <a:p>
-            <a:r>
-              <a:rPr sz="1000" b="1">
+            <a:pPr>
+              <a:lnSpc>
+                <a:spcPct val="150000"/>
+              </a:lnSpc>
+            </a:pPr>
+            <a:r>
+              <a:rPr sz="1000" b="1" dirty="0">
                 <a:solidFill>
                   <a:srgbClr val="F8FAFC"/>
                 </a:solidFill>
@@ -7128,7 +7631,7 @@
               <a:t>• Unconscious Victim Failsafe : </a:t>
             </a:r>
             <a:r>
-              <a:rPr sz="950" b="0">
+              <a:rPr sz="950" b="0" dirty="0">
                 <a:solidFill>
                   <a:srgbClr val="94A3B8"/>
                 </a:solidFill>
@@ -7137,7 +7640,7 @@
               <a:t>None (Victim must dial phone)  |  None (Depends on random passerby)  ➔  </a:t>
             </a:r>
             <a:r>
-              <a:rPr sz="1000" b="1">
+              <a:rPr sz="1000" b="1" dirty="0">
                 <a:solidFill>
                   <a:srgbClr val="10B981"/>
                 </a:solidFill>
@@ -7148,8 +7651,13 @@
             </a:r>
           </a:p>
           <a:p>
-            <a:r>
-              <a:rPr sz="1000" b="1">
+            <a:pPr>
+              <a:lnSpc>
+                <a:spcPct val="150000"/>
+              </a:lnSpc>
+            </a:pPr>
+            <a:r>
+              <a:rPr sz="1000" b="1" dirty="0">
                 <a:solidFill>
                   <a:srgbClr val="F8FAFC"/>
                 </a:solidFill>
@@ -7158,7 +7666,7 @@
               <a:t>• Traffic Intersection Control : </a:t>
             </a:r>
             <a:r>
-              <a:rPr sz="950" b="0">
+              <a:rPr sz="950" b="0" dirty="0">
                 <a:solidFill>
                   <a:srgbClr val="94A3B8"/>
                 </a:solidFill>
@@ -7167,7 +7675,7 @@
               <a:t>None (Ambulance stuck in gridlock)  |  Manual Police Phone Calls (Rare)  ➔  </a:t>
             </a:r>
             <a:r>
-              <a:rPr sz="1000" b="1">
+              <a:rPr sz="1000" b="1" dirty="0">
                 <a:solidFill>
                   <a:srgbClr val="10B981"/>
                 </a:solidFill>
@@ -7178,8 +7686,13 @@
             </a:r>
           </a:p>
           <a:p>
-            <a:r>
-              <a:rPr sz="1000" b="1">
+            <a:pPr>
+              <a:lnSpc>
+                <a:spcPct val="150000"/>
+              </a:lnSpc>
+            </a:pPr>
+            <a:r>
+              <a:rPr sz="1000" b="1" dirty="0">
                 <a:solidFill>
                   <a:srgbClr val="F8FAFC"/>
                 </a:solidFill>
@@ -7188,7 +7701,7 @@
               <a:t>• Crash Scene Visual Triage  : </a:t>
             </a:r>
             <a:r>
-              <a:rPr sz="950" b="0">
+              <a:rPr sz="950" b="0" dirty="0">
                 <a:solidFill>
                   <a:srgbClr val="94A3B8"/>
                 </a:solidFill>
@@ -7197,19 +7710,42 @@
               <a:t>Manual WhatsApp / SMS Photos  |  None  ➔  </a:t>
             </a:r>
             <a:r>
-              <a:rPr sz="1000" b="1">
+              <a:rPr sz="1000" b="1" dirty="0">
                 <a:solidFill>
                   <a:srgbClr val="10B981"/>
                 </a:solidFill>
                 <a:latin typeface="Segoe UI"/>
               </a:rPr>
-              <a:t>Live WebRTC P2P DataChannel (Zero Disk Writes)
+              <a:t>Live WebRTC P2P </a:t>
+            </a:r>
+            <a:r>
+              <a:rPr sz="1000" b="1" dirty="0" err="1">
+                <a:solidFill>
+                  <a:srgbClr val="10B981"/>
+                </a:solidFill>
+                <a:latin typeface="Segoe UI"/>
+              </a:rPr>
+              <a:t>DataChannel</a:t>
+            </a:r>
+            <a:r>
+              <a:rPr sz="1000" b="1" dirty="0">
+                <a:solidFill>
+                  <a:srgbClr val="10B981"/>
+                </a:solidFill>
+                <a:latin typeface="Segoe UI"/>
+              </a:rPr>
+              <a:t> (Zero Disk Writes)
 </a:t>
             </a:r>
           </a:p>
           <a:p>
-            <a:r>
-              <a:rPr sz="1000" b="1">
+            <a:pPr>
+              <a:lnSpc>
+                <a:spcPct val="150000"/>
+              </a:lnSpc>
+            </a:pPr>
+            <a:r>
+              <a:rPr sz="1000" b="1" dirty="0">
                 <a:solidFill>
                   <a:srgbClr val="F8FAFC"/>
                 </a:solidFill>
@@ -7218,7 +7754,7 @@
               <a:t>• Crash Biomechanics Blackbox : </a:t>
             </a:r>
             <a:r>
-              <a:rPr sz="950" b="0">
+              <a:rPr sz="950" b="0" dirty="0">
                 <a:solidFill>
                   <a:srgbClr val="94A3B8"/>
                 </a:solidFill>
@@ -7227,7 +7763,7 @@
               <a:t>None  |  None  ➔  </a:t>
             </a:r>
             <a:r>
-              <a:rPr sz="1000" b="1">
+              <a:rPr sz="1000" b="1" dirty="0">
                 <a:solidFill>
                   <a:srgbClr val="10B981"/>
                 </a:solidFill>
@@ -7238,8 +7774,13 @@
             </a:r>
           </a:p>
           <a:p>
-            <a:r>
-              <a:rPr sz="1000" b="1">
+            <a:pPr>
+              <a:lnSpc>
+                <a:spcPct val="150000"/>
+              </a:lnSpc>
+            </a:pPr>
+            <a:r>
+              <a:rPr sz="1000" b="1" dirty="0">
                 <a:solidFill>
                   <a:srgbClr val="F8FAFC"/>
                 </a:solidFill>
@@ -7248,7 +7789,7 @@
               <a:t>• Emergency Health Identity  : </a:t>
             </a:r>
             <a:r>
-              <a:rPr sz="950" b="0">
+              <a:rPr sz="950" b="0" dirty="0">
                 <a:solidFill>
                   <a:srgbClr val="94A3B8"/>
                 </a:solidFill>
@@ -7257,7 +7798,7 @@
               <a:t>Unverified Manual Notes  |  None (Blind Resuscitation)  ➔  </a:t>
             </a:r>
             <a:r>
-              <a:rPr sz="1000" b="1">
+              <a:rPr sz="1000" b="1" dirty="0">
                 <a:solidFill>
                   <a:srgbClr val="10B981"/>
                 </a:solidFill>
@@ -7268,8 +7809,13 @@
             </a:r>
           </a:p>
           <a:p>
-            <a:r>
-              <a:rPr sz="1000" b="1">
+            <a:pPr>
+              <a:lnSpc>
+                <a:spcPct val="150000"/>
+              </a:lnSpc>
+            </a:pPr>
+            <a:r>
+              <a:rPr sz="1000" b="1" dirty="0">
                 <a:solidFill>
                   <a:srgbClr val="F8FAFC"/>
                 </a:solidFill>
@@ -7278,7 +7824,7 @@
               <a:t>• Hospital Readiness Prior to Docking : </a:t>
             </a:r>
             <a:r>
-              <a:rPr sz="950" b="0">
+              <a:rPr sz="950" b="0" dirty="0">
                 <a:solidFill>
                   <a:srgbClr val="94A3B8"/>
                 </a:solidFill>
@@ -7287,7 +7833,7 @@
               <a:t>Zero (Ad-hoc ER chaos)  |  Basic Verbal Phone Radio  ➔  </a:t>
             </a:r>
             <a:r>
-              <a:rPr sz="1000" b="1">
+              <a:rPr sz="1000" b="1" dirty="0">
                 <a:solidFill>
                   <a:srgbClr val="10B981"/>
                 </a:solidFill>
@@ -7308,7 +7854,7 @@
 </file>
 
 <file path=ppt/slides/slide18.xml><?xml version="1.0" encoding="utf-8"?>
-<p:sld xmlns:a="http://schemas.openxmlformats.org/drawingml/2006/main" xmlns:p="http://schemas.openxmlformats.org/presentationml/2006/main" xmlns:r="http://schemas.openxmlformats.org/officeDocument/2006/relationships">
+<p:sld xmlns:a="http://schemas.openxmlformats.org/drawingml/2006/main" xmlns:r="http://schemas.openxmlformats.org/officeDocument/2006/relationships" xmlns:p="http://schemas.openxmlformats.org/presentationml/2006/main">
   <p:cSld>
     <p:spTree>
       <p:nvGrpSpPr>
@@ -7316,7 +7862,14 @@
         <p:cNvGrpSpPr/>
         <p:nvPr/>
       </p:nvGrpSpPr>
-      <p:grpSpPr/>
+      <p:grpSpPr>
+        <a:xfrm>
+          <a:off x="0" y="0"/>
+          <a:ext cx="0" cy="0"/>
+          <a:chOff x="0" y="0"/>
+          <a:chExt cx="0" cy="0"/>
+        </a:xfrm>
+      </p:grpSpPr>
       <p:sp>
         <p:nvSpPr>
           <p:cNvPr id="2" name="Rectangle 1"/>
@@ -7356,7 +7909,12 @@
           <a:bodyPr rtlCol="0" anchor="ctr"/>
           <a:lstStyle/>
           <a:p>
-            <a:pPr algn="ctr"/>
+            <a:pPr algn="ctr">
+              <a:lnSpc>
+                <a:spcPct val="150000"/>
+              </a:lnSpc>
+            </a:pPr>
+            <a:endParaRPr/>
           </a:p>
         </p:txBody>
       </p:sp>
@@ -7369,7 +7927,7 @@
         <p:spPr>
           <a:xfrm>
             <a:off x="731520" y="365760"/>
-            <a:ext cx="10698480" cy="365760"/>
+            <a:ext cx="10698480" cy="222369"/>
           </a:xfrm>
           <a:prstGeom prst="rect">
             <a:avLst/>
@@ -7377,11 +7935,16 @@
           <a:noFill/>
         </p:spPr>
         <p:txBody>
-          <a:bodyPr wrap="square" lIns="0" rIns="0" tIns="0" bIns="0">
+          <a:bodyPr wrap="square" lIns="0" tIns="0" rIns="0" bIns="0">
             <a:spAutoFit/>
           </a:bodyPr>
           <a:lstStyle/>
           <a:p>
+            <a:pPr>
+              <a:lnSpc>
+                <a:spcPct val="150000"/>
+              </a:lnSpc>
+            </a:pPr>
             <a:r>
               <a:rPr sz="1100" b="1">
                 <a:solidFill>
@@ -7403,7 +7966,7 @@
         <p:spPr>
           <a:xfrm>
             <a:off x="731520" y="640080"/>
-            <a:ext cx="10698480" cy="640080"/>
+            <a:ext cx="10698480" cy="444737"/>
           </a:xfrm>
           <a:prstGeom prst="rect">
             <a:avLst/>
@@ -7411,11 +7974,16 @@
           <a:noFill/>
         </p:spPr>
         <p:txBody>
-          <a:bodyPr wrap="square" lIns="0" rIns="0" tIns="0" bIns="0">
+          <a:bodyPr wrap="square" lIns="0" tIns="0" rIns="0" bIns="0">
             <a:spAutoFit/>
           </a:bodyPr>
           <a:lstStyle/>
           <a:p>
+            <a:pPr>
+              <a:lnSpc>
+                <a:spcPct val="150000"/>
+              </a:lnSpc>
+            </a:pPr>
             <a:r>
               <a:rPr sz="2200" b="1">
                 <a:solidFill>
@@ -7469,7 +8037,12 @@
           <a:bodyPr rtlCol="0" anchor="ctr"/>
           <a:lstStyle/>
           <a:p>
-            <a:pPr algn="ctr"/>
+            <a:pPr algn="ctr">
+              <a:lnSpc>
+                <a:spcPct val="150000"/>
+              </a:lnSpc>
+            </a:pPr>
+            <a:endParaRPr/>
           </a:p>
         </p:txBody>
       </p:sp>
@@ -7481,8 +8054,8 @@
         </p:nvSpPr>
         <p:spPr>
           <a:xfrm>
-            <a:off x="1280160" y="1645920"/>
-            <a:ext cx="9601200" cy="4389120"/>
+            <a:off x="1093347" y="1371600"/>
+            <a:ext cx="9601200" cy="5023683"/>
           </a:xfrm>
           <a:prstGeom prst="rect">
             <a:avLst/>
@@ -7495,8 +8068,13 @@
           </a:bodyPr>
           <a:lstStyle/>
           <a:p>
-            <a:r>
-              <a:rPr sz="2000" b="1">
+            <a:pPr>
+              <a:lnSpc>
+                <a:spcPct val="150000"/>
+              </a:lnSpc>
+            </a:pPr>
+            <a:r>
+              <a:rPr sz="2000" b="1" dirty="0">
                 <a:solidFill>
                   <a:srgbClr val="10B981"/>
                 </a:solidFill>
@@ -7507,21 +8085,49 @@
             </a:r>
           </a:p>
           <a:p>
-            <a:r>
-              <a:rPr sz="1200" b="0">
+            <a:pPr>
+              <a:lnSpc>
+                <a:spcPct val="150000"/>
+              </a:lnSpc>
+            </a:pPr>
+            <a:r>
+              <a:rPr sz="1200" b="0" dirty="0">
                 <a:solidFill>
                   <a:srgbClr val="F8FAFC"/>
                 </a:solidFill>
                 <a:latin typeface="Segoe UI"/>
               </a:rPr>
               <a:t>Every 200 seconds, another family in India loses a child, a parent, or a breadwinner on our roads. The barrier to saving these lives has never been medical capability — our surgeons are world-class. The barrier has always been the chaotic 40-minute delay of discovery, traffic paralysis, and blind hospital intake.
-Rakshak-AI breaks this barrier completely. By transforming every smartphone into an autonomous trauma blackbox, every traffic signal into an intelligent green wave, and every hospital bay into an informed surgical suite, we return the Golden Hour to where it belongs: to the patient.
+Rakshak-AI breaks this barrier completely. By transforming every smartphone into an autonomous trauma </a:t>
+            </a:r>
+            <a:r>
+              <a:rPr sz="1200" b="0" dirty="0" err="1">
+                <a:solidFill>
+                  <a:srgbClr val="F8FAFC"/>
+                </a:solidFill>
+                <a:latin typeface="Segoe UI"/>
+              </a:rPr>
+              <a:t>blackbox</a:t>
+            </a:r>
+            <a:r>
+              <a:rPr sz="1200" b="0" dirty="0">
+                <a:solidFill>
+                  <a:srgbClr val="F8FAFC"/>
+                </a:solidFill>
+                <a:latin typeface="Segoe UI"/>
+              </a:rPr>
+              <a:t>, every traffic signal into an intelligent green wave, and every hospital bay into an informed surgical suite, we return the Golden Hour to where it belongs: to the patient.
 </a:t>
             </a:r>
           </a:p>
           <a:p>
-            <a:r>
-              <a:rPr sz="1200" b="1">
+            <a:pPr>
+              <a:lnSpc>
+                <a:spcPct val="150000"/>
+              </a:lnSpc>
+            </a:pPr>
+            <a:r>
+              <a:rPr sz="1200" b="1" dirty="0">
                 <a:solidFill>
                   <a:srgbClr val="38BDF8"/>
                 </a:solidFill>
@@ -7532,30 +8138,81 @@
             </a:r>
           </a:p>
           <a:p>
-            <a:r>
-              <a:rPr sz="1100" b="0">
+            <a:pPr>
+              <a:lnSpc>
+                <a:spcPct val="150000"/>
+              </a:lnSpc>
+            </a:pPr>
+            <a:r>
+              <a:rPr sz="1100" b="0" dirty="0">
                 <a:solidFill>
                   <a:srgbClr val="10B981"/>
                 </a:solidFill>
                 <a:latin typeface="Segoe UI"/>
               </a:rPr>
-              <a:t>✅ Transit Time Slashed from 38 mins to 9.4 mins (75% Faster Delivery)</a:t>
-            </a:r>
-          </a:p>
-          <a:p>
-            <a:r>
-              <a:rPr sz="1100" b="0">
+              <a:t>✅ Transit Time Slashed from 38 mins to </a:t>
+            </a:r>
+            <a:r>
+              <a:rPr lang="en-US" sz="1100" dirty="0">
                 <a:solidFill>
                   <a:srgbClr val="10B981"/>
                 </a:solidFill>
                 <a:latin typeface="Segoe UI"/>
               </a:rPr>
+              <a:t>12</a:t>
+            </a:r>
+            <a:r>
+              <a:rPr sz="1100" b="0" dirty="0">
+                <a:solidFill>
+                  <a:srgbClr val="10B981"/>
+                </a:solidFill>
+                <a:latin typeface="Segoe UI"/>
+              </a:rPr>
+              <a:t> mins (</a:t>
+            </a:r>
+            <a:r>
+              <a:rPr lang="en-US" sz="1100" dirty="0">
+                <a:solidFill>
+                  <a:srgbClr val="10B981"/>
+                </a:solidFill>
+                <a:latin typeface="Segoe UI"/>
+              </a:rPr>
+              <a:t>62</a:t>
+            </a:r>
+            <a:r>
+              <a:rPr sz="1100" b="0" dirty="0">
+                <a:solidFill>
+                  <a:srgbClr val="10B981"/>
+                </a:solidFill>
+                <a:latin typeface="Segoe UI"/>
+              </a:rPr>
+              <a:t>% Faster Delivery)</a:t>
+            </a:r>
+          </a:p>
+          <a:p>
+            <a:pPr>
+              <a:lnSpc>
+                <a:spcPct val="150000"/>
+              </a:lnSpc>
+            </a:pPr>
+            <a:r>
+              <a:rPr sz="1100" b="0" dirty="0">
+                <a:solidFill>
+                  <a:srgbClr val="10B981"/>
+                </a:solidFill>
+                <a:latin typeface="Segoe UI"/>
+              </a:rPr>
               <a:t>✅ 100% Zero-Storage Privacy Compliance (Volatile Redis RAM, DPDP Act 2023)</a:t>
             </a:r>
           </a:p>
           <a:p>
-            <a:r>
-              <a:rPr sz="1100" b="0">
+            <a:pPr>
+              <a:lnSpc>
+                <a:spcPct val="150000"/>
+              </a:lnSpc>
+            </a:pPr>
+            <a:r>
+              <a:rPr sz="1100" b="0" dirty="0">
                 <a:solidFill>
                   <a:srgbClr val="10B981"/>
                 </a:solidFill>
@@ -7565,8 +8222,13 @@
             </a:r>
           </a:p>
           <a:p>
-            <a:r>
-              <a:rPr sz="1100" b="0">
+            <a:pPr>
+              <a:lnSpc>
+                <a:spcPct val="150000"/>
+              </a:lnSpc>
+            </a:pPr>
+            <a:r>
+              <a:rPr sz="1100" b="0" dirty="0">
                 <a:solidFill>
                   <a:srgbClr val="10B981"/>
                 </a:solidFill>
@@ -7576,15 +8238,17 @@
             </a:r>
           </a:p>
           <a:p>
-            <a:r>
-              <a:rPr sz="1100" b="0">
-                <a:solidFill>
-                  <a:srgbClr val="10B981"/>
-                </a:solidFill>
-                <a:latin typeface="Segoe UI"/>
-              </a:rPr>
-              <a:t>✅ Fully Tested: 38/38 Flutter Tests, 18/18 Backend Tests, Clean TypeScript Builds</a:t>
-            </a:r>
+            <a:pPr>
+              <a:lnSpc>
+                <a:spcPct val="150000"/>
+              </a:lnSpc>
+            </a:pPr>
+            <a:endParaRPr sz="1100" b="0" dirty="0">
+              <a:solidFill>
+                <a:srgbClr val="10B981"/>
+              </a:solidFill>
+              <a:latin typeface="Segoe UI"/>
+            </a:endParaRPr>
           </a:p>
         </p:txBody>
       </p:sp>
@@ -7597,7 +8261,7 @@
 </file>
 
 <file path=ppt/slides/slide2.xml><?xml version="1.0" encoding="utf-8"?>
-<p:sld xmlns:a="http://schemas.openxmlformats.org/drawingml/2006/main" xmlns:p="http://schemas.openxmlformats.org/presentationml/2006/main" xmlns:r="http://schemas.openxmlformats.org/officeDocument/2006/relationships">
+<p:sld xmlns:a="http://schemas.openxmlformats.org/drawingml/2006/main" xmlns:r="http://schemas.openxmlformats.org/officeDocument/2006/relationships" xmlns:p="http://schemas.openxmlformats.org/presentationml/2006/main">
   <p:cSld>
     <p:spTree>
       <p:nvGrpSpPr>
@@ -7605,7 +8269,14 @@
         <p:cNvGrpSpPr/>
         <p:nvPr/>
       </p:nvGrpSpPr>
-      <p:grpSpPr/>
+      <p:grpSpPr>
+        <a:xfrm>
+          <a:off x="0" y="0"/>
+          <a:ext cx="0" cy="0"/>
+          <a:chOff x="0" y="0"/>
+          <a:chExt cx="0" cy="0"/>
+        </a:xfrm>
+      </p:grpSpPr>
       <p:sp>
         <p:nvSpPr>
           <p:cNvPr id="2" name="Rectangle 1"/>
@@ -7645,7 +8316,12 @@
           <a:bodyPr rtlCol="0" anchor="ctr"/>
           <a:lstStyle/>
           <a:p>
-            <a:pPr algn="ctr"/>
+            <a:pPr algn="ctr">
+              <a:lnSpc>
+                <a:spcPct val="150000"/>
+              </a:lnSpc>
+            </a:pPr>
+            <a:endParaRPr/>
           </a:p>
         </p:txBody>
       </p:sp>
@@ -7658,7 +8334,7 @@
         <p:spPr>
           <a:xfrm>
             <a:off x="731520" y="365760"/>
-            <a:ext cx="10698480" cy="365760"/>
+            <a:ext cx="10698480" cy="222369"/>
           </a:xfrm>
           <a:prstGeom prst="rect">
             <a:avLst/>
@@ -7666,11 +8342,16 @@
           <a:noFill/>
         </p:spPr>
         <p:txBody>
-          <a:bodyPr wrap="square" lIns="0" rIns="0" tIns="0" bIns="0">
+          <a:bodyPr wrap="square" lIns="0" tIns="0" rIns="0" bIns="0">
             <a:spAutoFit/>
           </a:bodyPr>
           <a:lstStyle/>
           <a:p>
+            <a:pPr>
+              <a:lnSpc>
+                <a:spcPct val="150000"/>
+              </a:lnSpc>
+            </a:pPr>
             <a:r>
               <a:rPr sz="1100" b="1">
                 <a:solidFill>
@@ -7692,7 +8373,7 @@
         <p:spPr>
           <a:xfrm>
             <a:off x="731520" y="640080"/>
-            <a:ext cx="10698480" cy="640080"/>
+            <a:ext cx="10698480" cy="444737"/>
           </a:xfrm>
           <a:prstGeom prst="rect">
             <a:avLst/>
@@ -7700,11 +8381,16 @@
           <a:noFill/>
         </p:spPr>
         <p:txBody>
-          <a:bodyPr wrap="square" lIns="0" rIns="0" tIns="0" bIns="0">
+          <a:bodyPr wrap="square" lIns="0" tIns="0" rIns="0" bIns="0">
             <a:spAutoFit/>
           </a:bodyPr>
           <a:lstStyle/>
           <a:p>
+            <a:pPr>
+              <a:lnSpc>
+                <a:spcPct val="150000"/>
+              </a:lnSpc>
+            </a:pPr>
             <a:r>
               <a:rPr sz="2200" b="1">
                 <a:solidFill>
@@ -7758,7 +8444,12 @@
           <a:bodyPr rtlCol="0" anchor="ctr"/>
           <a:lstStyle/>
           <a:p>
-            <a:pPr algn="ctr"/>
+            <a:pPr algn="ctr">
+              <a:lnSpc>
+                <a:spcPct val="150000"/>
+              </a:lnSpc>
+            </a:pPr>
+            <a:endParaRPr/>
           </a:p>
         </p:txBody>
       </p:sp>
@@ -7771,7 +8462,7 @@
         <p:spPr>
           <a:xfrm>
             <a:off x="868680" y="1508760"/>
-            <a:ext cx="2286000" cy="1737360"/>
+            <a:ext cx="1999793" cy="1540999"/>
           </a:xfrm>
           <a:prstGeom prst="rect">
             <a:avLst/>
@@ -7779,11 +8470,16 @@
           <a:noFill/>
         </p:spPr>
         <p:txBody>
-          <a:bodyPr wrap="square" lIns="0" rIns="0" tIns="0" bIns="0">
+          <a:bodyPr wrap="square" lIns="0" tIns="0" rIns="0" bIns="0">
             <a:spAutoFit/>
           </a:bodyPr>
           <a:lstStyle/>
           <a:p>
+            <a:pPr>
+              <a:lnSpc>
+                <a:spcPct val="150000"/>
+              </a:lnSpc>
+            </a:pPr>
             <a:r>
               <a:rPr sz="2800" b="1">
                 <a:solidFill>
@@ -7795,6 +8491,11 @@
             </a:r>
           </a:p>
           <a:p>
+            <a:pPr>
+              <a:lnSpc>
+                <a:spcPct val="150000"/>
+              </a:lnSpc>
+            </a:pPr>
             <a:r>
               <a:rPr sz="1000" b="1">
                 <a:solidFill>
@@ -7806,6 +8507,11 @@
             </a:r>
           </a:p>
           <a:p>
+            <a:pPr>
+              <a:lnSpc>
+                <a:spcPct val="150000"/>
+              </a:lnSpc>
+            </a:pPr>
             <a:r>
               <a:rPr sz="1000" b="0">
                 <a:solidFill>
@@ -7859,7 +8565,12 @@
           <a:bodyPr rtlCol="0" anchor="ctr"/>
           <a:lstStyle/>
           <a:p>
-            <a:pPr algn="ctr"/>
+            <a:pPr algn="ctr">
+              <a:lnSpc>
+                <a:spcPct val="150000"/>
+              </a:lnSpc>
+            </a:pPr>
+            <a:endParaRPr/>
           </a:p>
         </p:txBody>
       </p:sp>
@@ -7872,7 +8583,7 @@
         <p:spPr>
           <a:xfrm>
             <a:off x="3593592" y="1508760"/>
-            <a:ext cx="2286000" cy="1737360"/>
+            <a:ext cx="2286000" cy="1540999"/>
           </a:xfrm>
           <a:prstGeom prst="rect">
             <a:avLst/>
@@ -7880,11 +8591,16 @@
           <a:noFill/>
         </p:spPr>
         <p:txBody>
-          <a:bodyPr wrap="square" lIns="0" rIns="0" tIns="0" bIns="0">
+          <a:bodyPr wrap="square" lIns="0" tIns="0" rIns="0" bIns="0">
             <a:spAutoFit/>
           </a:bodyPr>
           <a:lstStyle/>
           <a:p>
+            <a:pPr>
+              <a:lnSpc>
+                <a:spcPct val="150000"/>
+              </a:lnSpc>
+            </a:pPr>
             <a:r>
               <a:rPr sz="2800" b="1">
                 <a:solidFill>
@@ -7896,6 +8612,11 @@
             </a:r>
           </a:p>
           <a:p>
+            <a:pPr>
+              <a:lnSpc>
+                <a:spcPct val="150000"/>
+              </a:lnSpc>
+            </a:pPr>
             <a:r>
               <a:rPr sz="1000" b="1">
                 <a:solidFill>
@@ -7907,6 +8628,11 @@
             </a:r>
           </a:p>
           <a:p>
+            <a:pPr>
+              <a:lnSpc>
+                <a:spcPct val="150000"/>
+              </a:lnSpc>
+            </a:pPr>
             <a:r>
               <a:rPr sz="1000" b="0">
                 <a:solidFill>
@@ -7960,7 +8686,12 @@
           <a:bodyPr rtlCol="0" anchor="ctr"/>
           <a:lstStyle/>
           <a:p>
-            <a:pPr algn="ctr"/>
+            <a:pPr algn="ctr">
+              <a:lnSpc>
+                <a:spcPct val="150000"/>
+              </a:lnSpc>
+            </a:pPr>
+            <a:endParaRPr/>
           </a:p>
         </p:txBody>
       </p:sp>
@@ -7973,7 +8704,7 @@
         <p:spPr>
           <a:xfrm>
             <a:off x="6318504" y="1508760"/>
-            <a:ext cx="2286000" cy="1737360"/>
+            <a:ext cx="2286000" cy="1540999"/>
           </a:xfrm>
           <a:prstGeom prst="rect">
             <a:avLst/>
@@ -7981,11 +8712,16 @@
           <a:noFill/>
         </p:spPr>
         <p:txBody>
-          <a:bodyPr wrap="square" lIns="0" rIns="0" tIns="0" bIns="0">
+          <a:bodyPr wrap="square" lIns="0" tIns="0" rIns="0" bIns="0">
             <a:spAutoFit/>
           </a:bodyPr>
           <a:lstStyle/>
           <a:p>
+            <a:pPr>
+              <a:lnSpc>
+                <a:spcPct val="150000"/>
+              </a:lnSpc>
+            </a:pPr>
             <a:r>
               <a:rPr sz="2800" b="1">
                 <a:solidFill>
@@ -7997,6 +8733,11 @@
             </a:r>
           </a:p>
           <a:p>
+            <a:pPr>
+              <a:lnSpc>
+                <a:spcPct val="150000"/>
+              </a:lnSpc>
+            </a:pPr>
             <a:r>
               <a:rPr sz="1000" b="1">
                 <a:solidFill>
@@ -8008,6 +8749,11 @@
             </a:r>
           </a:p>
           <a:p>
+            <a:pPr>
+              <a:lnSpc>
+                <a:spcPct val="150000"/>
+              </a:lnSpc>
+            </a:pPr>
             <a:r>
               <a:rPr sz="1000" b="0">
                 <a:solidFill>
@@ -8061,7 +8807,12 @@
           <a:bodyPr rtlCol="0" anchor="ctr"/>
           <a:lstStyle/>
           <a:p>
-            <a:pPr algn="ctr"/>
+            <a:pPr algn="ctr">
+              <a:lnSpc>
+                <a:spcPct val="150000"/>
+              </a:lnSpc>
+            </a:pPr>
+            <a:endParaRPr/>
           </a:p>
         </p:txBody>
       </p:sp>
@@ -8074,7 +8825,7 @@
         <p:spPr>
           <a:xfrm>
             <a:off x="9043416" y="1508760"/>
-            <a:ext cx="2286000" cy="1737360"/>
+            <a:ext cx="2286000" cy="1540999"/>
           </a:xfrm>
           <a:prstGeom prst="rect">
             <a:avLst/>
@@ -8082,11 +8833,16 @@
           <a:noFill/>
         </p:spPr>
         <p:txBody>
-          <a:bodyPr wrap="square" lIns="0" rIns="0" tIns="0" bIns="0">
+          <a:bodyPr wrap="square" lIns="0" tIns="0" rIns="0" bIns="0">
             <a:spAutoFit/>
           </a:bodyPr>
           <a:lstStyle/>
           <a:p>
+            <a:pPr>
+              <a:lnSpc>
+                <a:spcPct val="150000"/>
+              </a:lnSpc>
+            </a:pPr>
             <a:r>
               <a:rPr sz="2800" b="1">
                 <a:solidFill>
@@ -8098,6 +8854,11 @@
             </a:r>
           </a:p>
           <a:p>
+            <a:pPr>
+              <a:lnSpc>
+                <a:spcPct val="150000"/>
+              </a:lnSpc>
+            </a:pPr>
             <a:r>
               <a:rPr sz="1000" b="1">
                 <a:solidFill>
@@ -8109,6 +8870,11 @@
             </a:r>
           </a:p>
           <a:p>
+            <a:pPr>
+              <a:lnSpc>
+                <a:spcPct val="150000"/>
+              </a:lnSpc>
+            </a:pPr>
             <a:r>
               <a:rPr sz="1000" b="0">
                 <a:solidFill>
@@ -8162,7 +8928,12 @@
           <a:bodyPr rtlCol="0" anchor="ctr"/>
           <a:lstStyle/>
           <a:p>
-            <a:pPr algn="ctr"/>
+            <a:pPr algn="ctr">
+              <a:lnSpc>
+                <a:spcPct val="150000"/>
+              </a:lnSpc>
+            </a:pPr>
+            <a:endParaRPr/>
           </a:p>
         </p:txBody>
       </p:sp>
@@ -8188,6 +8959,11 @@
           </a:bodyPr>
           <a:lstStyle/>
           <a:p>
+            <a:pPr>
+              <a:lnSpc>
+                <a:spcPct val="150000"/>
+              </a:lnSpc>
+            </a:pPr>
             <a:r>
               <a:rPr sz="1400" b="1">
                 <a:solidFill>
@@ -8199,6 +8975,11 @@
             </a:r>
           </a:p>
           <a:p>
+            <a:pPr>
+              <a:lnSpc>
+                <a:spcPct val="150000"/>
+              </a:lnSpc>
+            </a:pPr>
             <a:r>
               <a:rPr sz="1100" b="1">
                 <a:solidFill>
@@ -8219,6 +9000,11 @@
             </a:r>
           </a:p>
           <a:p>
+            <a:pPr>
+              <a:lnSpc>
+                <a:spcPct val="150000"/>
+              </a:lnSpc>
+            </a:pPr>
             <a:r>
               <a:rPr sz="1100" b="1">
                 <a:solidFill>
@@ -8239,6 +9025,11 @@
             </a:r>
           </a:p>
           <a:p>
+            <a:pPr>
+              <a:lnSpc>
+                <a:spcPct val="150000"/>
+              </a:lnSpc>
+            </a:pPr>
             <a:r>
               <a:rPr sz="1100" b="1">
                 <a:solidFill>
@@ -8259,6 +9050,11 @@
             </a:r>
           </a:p>
           <a:p>
+            <a:pPr>
+              <a:lnSpc>
+                <a:spcPct val="150000"/>
+              </a:lnSpc>
+            </a:pPr>
             <a:r>
               <a:rPr sz="1100" b="1">
                 <a:solidFill>
@@ -8289,7 +9085,7 @@
 </file>
 
 <file path=ppt/slides/slide3.xml><?xml version="1.0" encoding="utf-8"?>
-<p:sld xmlns:a="http://schemas.openxmlformats.org/drawingml/2006/main" xmlns:p="http://schemas.openxmlformats.org/presentationml/2006/main" xmlns:r="http://schemas.openxmlformats.org/officeDocument/2006/relationships">
+<p:sld xmlns:a="http://schemas.openxmlformats.org/drawingml/2006/main" xmlns:r="http://schemas.openxmlformats.org/officeDocument/2006/relationships" xmlns:p="http://schemas.openxmlformats.org/presentationml/2006/main">
   <p:cSld>
     <p:spTree>
       <p:nvGrpSpPr>
@@ -8297,7 +9093,14 @@
         <p:cNvGrpSpPr/>
         <p:nvPr/>
       </p:nvGrpSpPr>
-      <p:grpSpPr/>
+      <p:grpSpPr>
+        <a:xfrm>
+          <a:off x="0" y="0"/>
+          <a:ext cx="0" cy="0"/>
+          <a:chOff x="0" y="0"/>
+          <a:chExt cx="0" cy="0"/>
+        </a:xfrm>
+      </p:grpSpPr>
       <p:sp>
         <p:nvSpPr>
           <p:cNvPr id="2" name="Rectangle 1"/>
@@ -8337,7 +9140,12 @@
           <a:bodyPr rtlCol="0" anchor="ctr"/>
           <a:lstStyle/>
           <a:p>
-            <a:pPr algn="ctr"/>
+            <a:pPr algn="ctr">
+              <a:lnSpc>
+                <a:spcPct val="150000"/>
+              </a:lnSpc>
+            </a:pPr>
+            <a:endParaRPr/>
           </a:p>
         </p:txBody>
       </p:sp>
@@ -8350,7 +9158,7 @@
         <p:spPr>
           <a:xfrm>
             <a:off x="731520" y="365760"/>
-            <a:ext cx="10698480" cy="365760"/>
+            <a:ext cx="10698480" cy="222369"/>
           </a:xfrm>
           <a:prstGeom prst="rect">
             <a:avLst/>
@@ -8358,11 +9166,16 @@
           <a:noFill/>
         </p:spPr>
         <p:txBody>
-          <a:bodyPr wrap="square" lIns="0" rIns="0" tIns="0" bIns="0">
+          <a:bodyPr wrap="square" lIns="0" tIns="0" rIns="0" bIns="0">
             <a:spAutoFit/>
           </a:bodyPr>
           <a:lstStyle/>
           <a:p>
+            <a:pPr>
+              <a:lnSpc>
+                <a:spcPct val="150000"/>
+              </a:lnSpc>
+            </a:pPr>
             <a:r>
               <a:rPr sz="1100" b="1">
                 <a:solidFill>
@@ -8384,7 +9197,7 @@
         <p:spPr>
           <a:xfrm>
             <a:off x="731520" y="640080"/>
-            <a:ext cx="10698480" cy="640080"/>
+            <a:ext cx="10698480" cy="444737"/>
           </a:xfrm>
           <a:prstGeom prst="rect">
             <a:avLst/>
@@ -8392,11 +9205,16 @@
           <a:noFill/>
         </p:spPr>
         <p:txBody>
-          <a:bodyPr wrap="square" lIns="0" rIns="0" tIns="0" bIns="0">
+          <a:bodyPr wrap="square" lIns="0" tIns="0" rIns="0" bIns="0">
             <a:spAutoFit/>
           </a:bodyPr>
           <a:lstStyle/>
           <a:p>
+            <a:pPr>
+              <a:lnSpc>
+                <a:spcPct val="150000"/>
+              </a:lnSpc>
+            </a:pPr>
             <a:r>
               <a:rPr sz="2200" b="1">
                 <a:solidFill>
@@ -8450,7 +9268,12 @@
           <a:bodyPr rtlCol="0" anchor="ctr"/>
           <a:lstStyle/>
           <a:p>
-            <a:pPr algn="ctr"/>
+            <a:pPr algn="ctr">
+              <a:lnSpc>
+                <a:spcPct val="150000"/>
+              </a:lnSpc>
+            </a:pPr>
+            <a:endParaRPr/>
           </a:p>
         </p:txBody>
       </p:sp>
@@ -8463,7 +9286,7 @@
         <p:spPr>
           <a:xfrm>
             <a:off x="914400" y="1554480"/>
-            <a:ext cx="4846320" cy="4663440"/>
+            <a:ext cx="4846320" cy="4357155"/>
           </a:xfrm>
           <a:prstGeom prst="rect">
             <a:avLst/>
@@ -8476,6 +9299,11 @@
           </a:bodyPr>
           <a:lstStyle/>
           <a:p>
+            <a:pPr>
+              <a:lnSpc>
+                <a:spcPct val="150000"/>
+              </a:lnSpc>
+            </a:pPr>
             <a:r>
               <a:rPr sz="1400" b="1">
                 <a:solidFill>
@@ -8488,6 +9316,11 @@
             </a:r>
           </a:p>
           <a:p>
+            <a:pPr>
+              <a:lnSpc>
+                <a:spcPct val="150000"/>
+              </a:lnSpc>
+            </a:pPr>
             <a:r>
               <a:rPr sz="1100" b="1">
                 <a:solidFill>
@@ -8509,6 +9342,11 @@
             </a:r>
           </a:p>
           <a:p>
+            <a:pPr>
+              <a:lnSpc>
+                <a:spcPct val="150000"/>
+              </a:lnSpc>
+            </a:pPr>
             <a:r>
               <a:rPr sz="1100" b="1">
                 <a:solidFill>
@@ -8530,6 +9368,11 @@
             </a:r>
           </a:p>
           <a:p>
+            <a:pPr>
+              <a:lnSpc>
+                <a:spcPct val="150000"/>
+              </a:lnSpc>
+            </a:pPr>
             <a:r>
               <a:rPr sz="1100" b="1">
                 <a:solidFill>
@@ -8551,6 +9394,11 @@
             </a:r>
           </a:p>
           <a:p>
+            <a:pPr>
+              <a:lnSpc>
+                <a:spcPct val="150000"/>
+              </a:lnSpc>
+            </a:pPr>
             <a:r>
               <a:rPr sz="1100" b="1">
                 <a:solidFill>
@@ -8614,7 +9462,12 @@
           <a:bodyPr rtlCol="0" anchor="ctr"/>
           <a:lstStyle/>
           <a:p>
-            <a:pPr algn="ctr"/>
+            <a:pPr algn="ctr">
+              <a:lnSpc>
+                <a:spcPct val="150000"/>
+              </a:lnSpc>
+            </a:pPr>
+            <a:endParaRPr/>
           </a:p>
         </p:txBody>
       </p:sp>
@@ -8627,7 +9480,7 @@
         <p:spPr>
           <a:xfrm>
             <a:off x="6400800" y="1554480"/>
-            <a:ext cx="4846320" cy="4663440"/>
+            <a:ext cx="4846320" cy="4264822"/>
           </a:xfrm>
           <a:prstGeom prst="rect">
             <a:avLst/>
@@ -8640,6 +9493,11 @@
           </a:bodyPr>
           <a:lstStyle/>
           <a:p>
+            <a:pPr>
+              <a:lnSpc>
+                <a:spcPct val="150000"/>
+              </a:lnSpc>
+            </a:pPr>
             <a:r>
               <a:rPr sz="1400" b="1">
                 <a:solidFill>
@@ -8652,6 +9510,11 @@
             </a:r>
           </a:p>
           <a:p>
+            <a:pPr>
+              <a:lnSpc>
+                <a:spcPct val="150000"/>
+              </a:lnSpc>
+            </a:pPr>
             <a:r>
               <a:rPr sz="1100" b="1">
                 <a:solidFill>
@@ -8673,6 +9536,11 @@
             </a:r>
           </a:p>
           <a:p>
+            <a:pPr>
+              <a:lnSpc>
+                <a:spcPct val="150000"/>
+              </a:lnSpc>
+            </a:pPr>
             <a:r>
               <a:rPr sz="1100" b="1">
                 <a:solidFill>
@@ -8694,6 +9562,11 @@
             </a:r>
           </a:p>
           <a:p>
+            <a:pPr>
+              <a:lnSpc>
+                <a:spcPct val="150000"/>
+              </a:lnSpc>
+            </a:pPr>
             <a:r>
               <a:rPr sz="1100" b="1">
                 <a:solidFill>
@@ -8715,6 +9588,11 @@
             </a:r>
           </a:p>
           <a:p>
+            <a:pPr>
+              <a:lnSpc>
+                <a:spcPct val="150000"/>
+              </a:lnSpc>
+            </a:pPr>
             <a:r>
               <a:rPr sz="1100" b="1">
                 <a:solidFill>
@@ -8746,7 +9624,7 @@
 </file>
 
 <file path=ppt/slides/slide4.xml><?xml version="1.0" encoding="utf-8"?>
-<p:sld xmlns:a="http://schemas.openxmlformats.org/drawingml/2006/main" xmlns:p="http://schemas.openxmlformats.org/presentationml/2006/main" xmlns:r="http://schemas.openxmlformats.org/officeDocument/2006/relationships">
+<p:sld xmlns:a="http://schemas.openxmlformats.org/drawingml/2006/main" xmlns:r="http://schemas.openxmlformats.org/officeDocument/2006/relationships" xmlns:p="http://schemas.openxmlformats.org/presentationml/2006/main">
   <p:cSld>
     <p:spTree>
       <p:nvGrpSpPr>
@@ -8754,7 +9632,14 @@
         <p:cNvGrpSpPr/>
         <p:nvPr/>
       </p:nvGrpSpPr>
-      <p:grpSpPr/>
+      <p:grpSpPr>
+        <a:xfrm>
+          <a:off x="0" y="0"/>
+          <a:ext cx="0" cy="0"/>
+          <a:chOff x="0" y="0"/>
+          <a:chExt cx="0" cy="0"/>
+        </a:xfrm>
+      </p:grpSpPr>
       <p:sp>
         <p:nvSpPr>
           <p:cNvPr id="2" name="Rectangle 1"/>
@@ -8795,6 +9680,7 @@
           <a:lstStyle/>
           <a:p>
             <a:pPr algn="ctr"/>
+            <a:endParaRPr/>
           </a:p>
         </p:txBody>
       </p:sp>
@@ -8815,7 +9701,7 @@
           <a:noFill/>
         </p:spPr>
         <p:txBody>
-          <a:bodyPr wrap="square" lIns="0" rIns="0" tIns="0" bIns="0">
+          <a:bodyPr wrap="square" lIns="0" tIns="0" rIns="0" bIns="0">
             <a:spAutoFit/>
           </a:bodyPr>
           <a:lstStyle/>
@@ -8849,7 +9735,7 @@
           <a:noFill/>
         </p:spPr>
         <p:txBody>
-          <a:bodyPr wrap="square" lIns="0" rIns="0" tIns="0" bIns="0">
+          <a:bodyPr wrap="square" lIns="0" tIns="0" rIns="0" bIns="0">
             <a:spAutoFit/>
           </a:bodyPr>
           <a:lstStyle/>
@@ -8908,6 +9794,7 @@
           <a:lstStyle/>
           <a:p>
             <a:pPr algn="ctr"/>
+            <a:endParaRPr/>
           </a:p>
         </p:txBody>
       </p:sp>
@@ -9001,6 +9888,7 @@
           <a:lstStyle/>
           <a:p>
             <a:pPr algn="ctr"/>
+            <a:endParaRPr/>
           </a:p>
         </p:txBody>
       </p:sp>
@@ -9094,6 +9982,7 @@
           <a:lstStyle/>
           <a:p>
             <a:pPr algn="ctr"/>
+            <a:endParaRPr/>
           </a:p>
         </p:txBody>
       </p:sp>
@@ -9187,6 +10076,7 @@
           <a:lstStyle/>
           <a:p>
             <a:pPr algn="ctr"/>
+            <a:endParaRPr/>
           </a:p>
         </p:txBody>
       </p:sp>
@@ -9247,7 +10137,7 @@
 </file>
 
 <file path=ppt/slides/slide5.xml><?xml version="1.0" encoding="utf-8"?>
-<p:sld xmlns:a="http://schemas.openxmlformats.org/drawingml/2006/main" xmlns:p="http://schemas.openxmlformats.org/presentationml/2006/main" xmlns:r="http://schemas.openxmlformats.org/officeDocument/2006/relationships">
+<p:sld xmlns:a="http://schemas.openxmlformats.org/drawingml/2006/main" xmlns:r="http://schemas.openxmlformats.org/officeDocument/2006/relationships" xmlns:p="http://schemas.openxmlformats.org/presentationml/2006/main">
   <p:cSld>
     <p:spTree>
       <p:nvGrpSpPr>
@@ -9255,7 +10145,14 @@
         <p:cNvGrpSpPr/>
         <p:nvPr/>
       </p:nvGrpSpPr>
-      <p:grpSpPr/>
+      <p:grpSpPr>
+        <a:xfrm>
+          <a:off x="0" y="0"/>
+          <a:ext cx="0" cy="0"/>
+          <a:chOff x="0" y="0"/>
+          <a:chExt cx="0" cy="0"/>
+        </a:xfrm>
+      </p:grpSpPr>
       <p:sp>
         <p:nvSpPr>
           <p:cNvPr id="2" name="Rectangle 1"/>
@@ -9296,6 +10193,7 @@
           <a:lstStyle/>
           <a:p>
             <a:pPr algn="ctr"/>
+            <a:endParaRPr/>
           </a:p>
         </p:txBody>
       </p:sp>
@@ -9316,7 +10214,7 @@
           <a:noFill/>
         </p:spPr>
         <p:txBody>
-          <a:bodyPr wrap="square" lIns="0" rIns="0" tIns="0" bIns="0">
+          <a:bodyPr wrap="square" lIns="0" tIns="0" rIns="0" bIns="0">
             <a:spAutoFit/>
           </a:bodyPr>
           <a:lstStyle/>
@@ -9350,7 +10248,7 @@
           <a:noFill/>
         </p:spPr>
         <p:txBody>
-          <a:bodyPr wrap="square" lIns="0" rIns="0" tIns="0" bIns="0">
+          <a:bodyPr wrap="square" lIns="0" tIns="0" rIns="0" bIns="0">
             <a:spAutoFit/>
           </a:bodyPr>
           <a:lstStyle/>
@@ -9409,6 +10307,7 @@
           <a:lstStyle/>
           <a:p>
             <a:pPr algn="ctr"/>
+            <a:endParaRPr/>
           </a:p>
         </p:txBody>
       </p:sp>
@@ -9589,6 +10488,7 @@
           <a:lstStyle/>
           <a:p>
             <a:pPr algn="ctr"/>
+            <a:endParaRPr/>
           </a:p>
         </p:txBody>
       </p:sp>
@@ -9658,6 +10558,7 @@
           <a:lstStyle/>
           <a:p>
             <a:pPr algn="ctr"/>
+            <a:endParaRPr/>
           </a:p>
         </p:txBody>
       </p:sp>
@@ -9852,7 +10753,7 @@
 </file>
 
 <file path=ppt/slides/slide6.xml><?xml version="1.0" encoding="utf-8"?>
-<p:sld xmlns:a="http://schemas.openxmlformats.org/drawingml/2006/main" xmlns:p="http://schemas.openxmlformats.org/presentationml/2006/main" xmlns:r="http://schemas.openxmlformats.org/officeDocument/2006/relationships">
+<p:sld xmlns:a="http://schemas.openxmlformats.org/drawingml/2006/main" xmlns:r="http://schemas.openxmlformats.org/officeDocument/2006/relationships" xmlns:p="http://schemas.openxmlformats.org/presentationml/2006/main">
   <p:cSld>
     <p:spTree>
       <p:nvGrpSpPr>
@@ -9860,7 +10761,14 @@
         <p:cNvGrpSpPr/>
         <p:nvPr/>
       </p:nvGrpSpPr>
-      <p:grpSpPr/>
+      <p:grpSpPr>
+        <a:xfrm>
+          <a:off x="0" y="0"/>
+          <a:ext cx="0" cy="0"/>
+          <a:chOff x="0" y="0"/>
+          <a:chExt cx="0" cy="0"/>
+        </a:xfrm>
+      </p:grpSpPr>
       <p:sp>
         <p:nvSpPr>
           <p:cNvPr id="2" name="Rectangle 1"/>
@@ -9900,7 +10808,12 @@
           <a:bodyPr rtlCol="0" anchor="ctr"/>
           <a:lstStyle/>
           <a:p>
-            <a:pPr algn="ctr"/>
+            <a:pPr algn="ctr">
+              <a:lnSpc>
+                <a:spcPct val="150000"/>
+              </a:lnSpc>
+            </a:pPr>
+            <a:endParaRPr/>
           </a:p>
         </p:txBody>
       </p:sp>
@@ -9913,7 +10826,7 @@
         <p:spPr>
           <a:xfrm>
             <a:off x="731520" y="365760"/>
-            <a:ext cx="10698480" cy="365760"/>
+            <a:ext cx="10698480" cy="222369"/>
           </a:xfrm>
           <a:prstGeom prst="rect">
             <a:avLst/>
@@ -9921,11 +10834,16 @@
           <a:noFill/>
         </p:spPr>
         <p:txBody>
-          <a:bodyPr wrap="square" lIns="0" rIns="0" tIns="0" bIns="0">
+          <a:bodyPr wrap="square" lIns="0" tIns="0" rIns="0" bIns="0">
             <a:spAutoFit/>
           </a:bodyPr>
           <a:lstStyle/>
           <a:p>
+            <a:pPr>
+              <a:lnSpc>
+                <a:spcPct val="150000"/>
+              </a:lnSpc>
+            </a:pPr>
             <a:r>
               <a:rPr sz="1100" b="1">
                 <a:solidFill>
@@ -9947,7 +10865,7 @@
         <p:spPr>
           <a:xfrm>
             <a:off x="731520" y="640080"/>
-            <a:ext cx="10698480" cy="640080"/>
+            <a:ext cx="10698480" cy="444737"/>
           </a:xfrm>
           <a:prstGeom prst="rect">
             <a:avLst/>
@@ -9955,11 +10873,16 @@
           <a:noFill/>
         </p:spPr>
         <p:txBody>
-          <a:bodyPr wrap="square" lIns="0" rIns="0" tIns="0" bIns="0">
+          <a:bodyPr wrap="square" lIns="0" tIns="0" rIns="0" bIns="0">
             <a:spAutoFit/>
           </a:bodyPr>
           <a:lstStyle/>
           <a:p>
+            <a:pPr>
+              <a:lnSpc>
+                <a:spcPct val="150000"/>
+              </a:lnSpc>
+            </a:pPr>
             <a:r>
               <a:rPr sz="2200" b="1">
                 <a:solidFill>
@@ -10013,7 +10936,12 @@
           <a:bodyPr rtlCol="0" anchor="ctr"/>
           <a:lstStyle/>
           <a:p>
-            <a:pPr algn="ctr"/>
+            <a:pPr algn="ctr">
+              <a:lnSpc>
+                <a:spcPct val="150000"/>
+              </a:lnSpc>
+            </a:pPr>
+            <a:endParaRPr/>
           </a:p>
         </p:txBody>
       </p:sp>
@@ -10026,7 +10954,7 @@
         <p:spPr>
           <a:xfrm>
             <a:off x="841248" y="1371600"/>
-            <a:ext cx="2304288" cy="2468880"/>
+            <a:ext cx="2304288" cy="2187330"/>
           </a:xfrm>
           <a:prstGeom prst="rect">
             <a:avLst/>
@@ -10039,6 +10967,11 @@
           </a:bodyPr>
           <a:lstStyle/>
           <a:p>
+            <a:pPr>
+              <a:lnSpc>
+                <a:spcPct val="150000"/>
+              </a:lnSpc>
+            </a:pPr>
             <a:r>
               <a:rPr sz="1200" b="1">
                 <a:solidFill>
@@ -10050,6 +10983,11 @@
             </a:r>
           </a:p>
           <a:p>
+            <a:pPr>
+              <a:lnSpc>
+                <a:spcPct val="150000"/>
+              </a:lnSpc>
+            </a:pPr>
             <a:r>
               <a:rPr sz="1000" b="0">
                 <a:solidFill>
@@ -10106,7 +11044,12 @@
           <a:bodyPr rtlCol="0" anchor="ctr"/>
           <a:lstStyle/>
           <a:p>
-            <a:pPr algn="ctr"/>
+            <a:pPr algn="ctr">
+              <a:lnSpc>
+                <a:spcPct val="150000"/>
+              </a:lnSpc>
+            </a:pPr>
+            <a:endParaRPr/>
           </a:p>
         </p:txBody>
       </p:sp>
@@ -10119,7 +11062,7 @@
         <p:spPr>
           <a:xfrm>
             <a:off x="3511296" y="1371600"/>
-            <a:ext cx="2304288" cy="2468880"/>
+            <a:ext cx="2304288" cy="2187330"/>
           </a:xfrm>
           <a:prstGeom prst="rect">
             <a:avLst/>
@@ -10132,6 +11075,11 @@
           </a:bodyPr>
           <a:lstStyle/>
           <a:p>
+            <a:pPr>
+              <a:lnSpc>
+                <a:spcPct val="150000"/>
+              </a:lnSpc>
+            </a:pPr>
             <a:r>
               <a:rPr sz="1200" b="1">
                 <a:solidFill>
@@ -10143,6 +11091,11 @@
             </a:r>
           </a:p>
           <a:p>
+            <a:pPr>
+              <a:lnSpc>
+                <a:spcPct val="150000"/>
+              </a:lnSpc>
+            </a:pPr>
             <a:r>
               <a:rPr sz="1000" b="0">
                 <a:solidFill>
@@ -10199,7 +11152,12 @@
           <a:bodyPr rtlCol="0" anchor="ctr"/>
           <a:lstStyle/>
           <a:p>
-            <a:pPr algn="ctr"/>
+            <a:pPr algn="ctr">
+              <a:lnSpc>
+                <a:spcPct val="150000"/>
+              </a:lnSpc>
+            </a:pPr>
+            <a:endParaRPr/>
           </a:p>
         </p:txBody>
       </p:sp>
@@ -10225,6 +11183,11 @@
           </a:bodyPr>
           <a:lstStyle/>
           <a:p>
+            <a:pPr>
+              <a:lnSpc>
+                <a:spcPct val="150000"/>
+              </a:lnSpc>
+            </a:pPr>
             <a:r>
               <a:rPr sz="1200" b="1">
                 <a:solidFill>
@@ -10236,6 +11199,11 @@
             </a:r>
           </a:p>
           <a:p>
+            <a:pPr>
+              <a:lnSpc>
+                <a:spcPct val="150000"/>
+              </a:lnSpc>
+            </a:pPr>
             <a:r>
               <a:rPr sz="1000" b="0">
                 <a:solidFill>
@@ -10292,7 +11260,12 @@
           <a:bodyPr rtlCol="0" anchor="ctr"/>
           <a:lstStyle/>
           <a:p>
-            <a:pPr algn="ctr"/>
+            <a:pPr algn="ctr">
+              <a:lnSpc>
+                <a:spcPct val="150000"/>
+              </a:lnSpc>
+            </a:pPr>
+            <a:endParaRPr/>
           </a:p>
         </p:txBody>
       </p:sp>
@@ -10305,7 +11278,7 @@
         <p:spPr>
           <a:xfrm>
             <a:off x="914400" y="4206240"/>
-            <a:ext cx="7498079" cy="2148840"/>
+            <a:ext cx="7498079" cy="1585690"/>
           </a:xfrm>
           <a:prstGeom prst="rect">
             <a:avLst/>
@@ -10318,6 +11291,11 @@
           </a:bodyPr>
           <a:lstStyle/>
           <a:p>
+            <a:pPr>
+              <a:lnSpc>
+                <a:spcPct val="150000"/>
+              </a:lnSpc>
+            </a:pPr>
             <a:r>
               <a:rPr sz="1200" b="1">
                 <a:solidFill>
@@ -10330,6 +11308,11 @@
             </a:r>
           </a:p>
           <a:p>
+            <a:pPr>
+              <a:lnSpc>
+                <a:spcPct val="150000"/>
+              </a:lnSpc>
+            </a:pPr>
             <a:r>
               <a:rPr sz="1050" b="0">
                 <a:solidFill>
@@ -10383,7 +11366,12 @@
           <a:bodyPr rtlCol="0" anchor="ctr"/>
           <a:lstStyle/>
           <a:p>
-            <a:pPr algn="ctr"/>
+            <a:pPr algn="ctr">
+              <a:lnSpc>
+                <a:spcPct val="150000"/>
+              </a:lnSpc>
+            </a:pPr>
+            <a:endParaRPr/>
           </a:p>
         </p:txBody>
       </p:sp>
@@ -10420,7 +11408,7 @@
 </file>
 
 <file path=ppt/slides/slide7.xml><?xml version="1.0" encoding="utf-8"?>
-<p:sld xmlns:a="http://schemas.openxmlformats.org/drawingml/2006/main" xmlns:p="http://schemas.openxmlformats.org/presentationml/2006/main" xmlns:r="http://schemas.openxmlformats.org/officeDocument/2006/relationships">
+<p:sld xmlns:a="http://schemas.openxmlformats.org/drawingml/2006/main" xmlns:r="http://schemas.openxmlformats.org/officeDocument/2006/relationships" xmlns:p="http://schemas.openxmlformats.org/presentationml/2006/main">
   <p:cSld>
     <p:spTree>
       <p:nvGrpSpPr>
@@ -10428,7 +11416,14 @@
         <p:cNvGrpSpPr/>
         <p:nvPr/>
       </p:nvGrpSpPr>
-      <p:grpSpPr/>
+      <p:grpSpPr>
+        <a:xfrm>
+          <a:off x="0" y="0"/>
+          <a:ext cx="0" cy="0"/>
+          <a:chOff x="0" y="0"/>
+          <a:chExt cx="0" cy="0"/>
+        </a:xfrm>
+      </p:grpSpPr>
       <p:sp>
         <p:nvSpPr>
           <p:cNvPr id="2" name="Rectangle 1"/>
@@ -10468,7 +11463,12 @@
           <a:bodyPr rtlCol="0" anchor="ctr"/>
           <a:lstStyle/>
           <a:p>
-            <a:pPr algn="ctr"/>
+            <a:pPr algn="ctr">
+              <a:lnSpc>
+                <a:spcPct val="150000"/>
+              </a:lnSpc>
+            </a:pPr>
+            <a:endParaRPr/>
           </a:p>
         </p:txBody>
       </p:sp>
@@ -10481,7 +11481,7 @@
         <p:spPr>
           <a:xfrm>
             <a:off x="731520" y="365760"/>
-            <a:ext cx="10698480" cy="365760"/>
+            <a:ext cx="10698480" cy="222369"/>
           </a:xfrm>
           <a:prstGeom prst="rect">
             <a:avLst/>
@@ -10489,11 +11489,16 @@
           <a:noFill/>
         </p:spPr>
         <p:txBody>
-          <a:bodyPr wrap="square" lIns="0" rIns="0" tIns="0" bIns="0">
+          <a:bodyPr wrap="square" lIns="0" tIns="0" rIns="0" bIns="0">
             <a:spAutoFit/>
           </a:bodyPr>
           <a:lstStyle/>
           <a:p>
+            <a:pPr>
+              <a:lnSpc>
+                <a:spcPct val="150000"/>
+              </a:lnSpc>
+            </a:pPr>
             <a:r>
               <a:rPr sz="1100" b="1">
                 <a:solidFill>
@@ -10515,7 +11520,7 @@
         <p:spPr>
           <a:xfrm>
             <a:off x="731520" y="640080"/>
-            <a:ext cx="10698480" cy="640080"/>
+            <a:ext cx="10698480" cy="444737"/>
           </a:xfrm>
           <a:prstGeom prst="rect">
             <a:avLst/>
@@ -10523,11 +11528,16 @@
           <a:noFill/>
         </p:spPr>
         <p:txBody>
-          <a:bodyPr wrap="square" lIns="0" rIns="0" tIns="0" bIns="0">
+          <a:bodyPr wrap="square" lIns="0" tIns="0" rIns="0" bIns="0">
             <a:spAutoFit/>
           </a:bodyPr>
           <a:lstStyle/>
           <a:p>
+            <a:pPr>
+              <a:lnSpc>
+                <a:spcPct val="150000"/>
+              </a:lnSpc>
+            </a:pPr>
             <a:r>
               <a:rPr sz="2200" b="1">
                 <a:solidFill>
@@ -10581,7 +11591,12 @@
           <a:bodyPr rtlCol="0" anchor="ctr"/>
           <a:lstStyle/>
           <a:p>
-            <a:pPr algn="ctr"/>
+            <a:pPr algn="ctr">
+              <a:lnSpc>
+                <a:spcPct val="150000"/>
+              </a:lnSpc>
+            </a:pPr>
+            <a:endParaRPr/>
           </a:p>
         </p:txBody>
       </p:sp>
@@ -10594,7 +11609,7 @@
         <p:spPr>
           <a:xfrm>
             <a:off x="914400" y="1417320"/>
-            <a:ext cx="4389120" cy="4937760"/>
+            <a:ext cx="4389120" cy="3687741"/>
           </a:xfrm>
           <a:prstGeom prst="rect">
             <a:avLst/>
@@ -10607,8 +11622,13 @@
           </a:bodyPr>
           <a:lstStyle/>
           <a:p>
-            <a:r>
-              <a:rPr sz="1200" b="1">
+            <a:pPr>
+              <a:lnSpc>
+                <a:spcPct val="150000"/>
+              </a:lnSpc>
+            </a:pPr>
+            <a:r>
+              <a:rPr sz="1200" b="1" dirty="0">
                 <a:solidFill>
                   <a:srgbClr val="10B981"/>
                 </a:solidFill>
@@ -10619,8 +11639,13 @@
             </a:r>
           </a:p>
           <a:p>
-            <a:r>
-              <a:rPr sz="1050" b="1">
+            <a:pPr>
+              <a:lnSpc>
+                <a:spcPct val="150000"/>
+              </a:lnSpc>
+            </a:pPr>
+            <a:r>
+              <a:rPr sz="1050" b="1" dirty="0">
                 <a:solidFill>
                   <a:srgbClr val="38BDF8"/>
                 </a:solidFill>
@@ -10629,7 +11654,7 @@
               <a:t>950-Meter Radar Geofence: </a:t>
             </a:r>
             <a:r>
-              <a:rPr sz="1000" b="0">
+              <a:rPr sz="1000" b="0" dirty="0">
                 <a:solidFill>
                   <a:srgbClr val="E2E8F0"/>
                 </a:solidFill>
@@ -10639,8 +11664,13 @@
             </a:r>
           </a:p>
           <a:p>
-            <a:r>
-              <a:rPr sz="1050" b="1">
+            <a:pPr>
+              <a:lnSpc>
+                <a:spcPct val="150000"/>
+              </a:lnSpc>
+            </a:pPr>
+            <a:r>
+              <a:rPr sz="1050" b="1" dirty="0">
                 <a:solidFill>
                   <a:srgbClr val="38BDF8"/>
                 </a:solidFill>
@@ -10649,7 +11679,7 @@
               <a:t>45-Second Advance Green Wave: </a:t>
             </a:r>
             <a:r>
-              <a:rPr sz="1000" b="0">
+              <a:rPr sz="1000" b="0" dirty="0">
                 <a:solidFill>
                   <a:srgbClr val="E2E8F0"/>
                 </a:solidFill>
@@ -10659,8 +11689,13 @@
             </a:r>
           </a:p>
           <a:p>
-            <a:r>
-              <a:rPr sz="1050" b="1">
+            <a:pPr>
+              <a:lnSpc>
+                <a:spcPct val="150000"/>
+              </a:lnSpc>
+            </a:pPr>
+            <a:r>
+              <a:rPr sz="1050" b="1" dirty="0">
                 <a:solidFill>
                   <a:srgbClr val="38BDF8"/>
                 </a:solidFill>
@@ -10669,7 +11704,7 @@
               <a:t>Zero Stoppage Transit Velocity: </a:t>
             </a:r>
             <a:r>
-              <a:rPr sz="1000" b="0">
+              <a:rPr sz="1000" b="0" dirty="0">
                 <a:solidFill>
                   <a:srgbClr val="E2E8F0"/>
                 </a:solidFill>
@@ -10679,8 +11714,13 @@
             </a:r>
           </a:p>
           <a:p>
-            <a:r>
-              <a:rPr sz="1050" b="1">
+            <a:pPr>
+              <a:lnSpc>
+                <a:spcPct val="150000"/>
+              </a:lnSpc>
+            </a:pPr>
+            <a:r>
+              <a:rPr sz="1050" b="1" dirty="0">
                 <a:solidFill>
                   <a:srgbClr val="38BDF8"/>
                 </a:solidFill>
@@ -10689,7 +11729,7 @@
               <a:t>NTCIP 1202 Standard: </a:t>
             </a:r>
             <a:r>
-              <a:rPr sz="1000" b="0">
+              <a:rPr sz="1000" b="0" dirty="0">
                 <a:solidFill>
                   <a:srgbClr val="E2E8F0"/>
                 </a:solidFill>
@@ -10699,8 +11739,13 @@
             </a:r>
           </a:p>
           <a:p>
-            <a:r>
-              <a:rPr sz="1050" b="1">
+            <a:pPr>
+              <a:lnSpc>
+                <a:spcPct val="150000"/>
+              </a:lnSpc>
+            </a:pPr>
+            <a:r>
+              <a:rPr sz="1050" b="1" dirty="0">
                 <a:solidFill>
                   <a:srgbClr val="38BDF8"/>
                 </a:solidFill>
@@ -10709,7 +11754,7 @@
               <a:t>YOLOv8 Municipal Edge Detection: </a:t>
             </a:r>
             <a:r>
-              <a:rPr sz="1000" b="0">
+              <a:rPr sz="1000" b="0" dirty="0">
                 <a:solidFill>
                   <a:srgbClr val="E2E8F0"/>
                 </a:solidFill>
@@ -10719,8 +11764,13 @@
             </a:r>
           </a:p>
           <a:p>
-            <a:r>
-              <a:rPr sz="1050" b="1">
+            <a:pPr>
+              <a:lnSpc>
+                <a:spcPct val="150000"/>
+              </a:lnSpc>
+            </a:pPr>
+            <a:r>
+              <a:rPr sz="1050" b="1" dirty="0">
                 <a:solidFill>
                   <a:srgbClr val="38BDF8"/>
                 </a:solidFill>
@@ -10729,7 +11779,7 @@
               <a:t>Dynamic A* Bottleneck Bypass: </a:t>
             </a:r>
             <a:r>
-              <a:rPr sz="1000" b="0">
+              <a:rPr sz="1000" b="0" dirty="0">
                 <a:solidFill>
                   <a:srgbClr val="E2E8F0"/>
                 </a:solidFill>
@@ -10805,7 +11855,12 @@
           <a:bodyPr rtlCol="0" anchor="ctr"/>
           <a:lstStyle/>
           <a:p>
-            <a:pPr algn="ctr"/>
+            <a:pPr algn="ctr">
+              <a:lnSpc>
+                <a:spcPct val="150000"/>
+              </a:lnSpc>
+            </a:pPr>
+            <a:endParaRPr/>
           </a:p>
         </p:txBody>
       </p:sp>
@@ -10818,7 +11873,7 @@
         <p:spPr>
           <a:xfrm>
             <a:off x="5806440" y="5212080"/>
-            <a:ext cx="5516575" cy="1188720"/>
+            <a:ext cx="5516575" cy="1033168"/>
           </a:xfrm>
           <a:prstGeom prst="rect">
             <a:avLst/>
@@ -10831,6 +11886,11 @@
           </a:bodyPr>
           <a:lstStyle/>
           <a:p>
+            <a:pPr>
+              <a:lnSpc>
+                <a:spcPct val="150000"/>
+              </a:lnSpc>
+            </a:pPr>
             <a:r>
               <a:rPr sz="1100" b="1">
                 <a:solidFill>
@@ -10843,6 +11903,11 @@
             </a:r>
           </a:p>
           <a:p>
+            <a:pPr>
+              <a:lnSpc>
+                <a:spcPct val="150000"/>
+              </a:lnSpc>
+            </a:pPr>
             <a:r>
               <a:rPr sz="1000" b="0">
                 <a:solidFill>
@@ -10864,7 +11929,7 @@
 </file>
 
 <file path=ppt/slides/slide8.xml><?xml version="1.0" encoding="utf-8"?>
-<p:sld xmlns:a="http://schemas.openxmlformats.org/drawingml/2006/main" xmlns:p="http://schemas.openxmlformats.org/presentationml/2006/main" xmlns:r="http://schemas.openxmlformats.org/officeDocument/2006/relationships">
+<p:sld xmlns:a="http://schemas.openxmlformats.org/drawingml/2006/main" xmlns:r="http://schemas.openxmlformats.org/officeDocument/2006/relationships" xmlns:p="http://schemas.openxmlformats.org/presentationml/2006/main">
   <p:cSld>
     <p:spTree>
       <p:nvGrpSpPr>
@@ -10872,7 +11937,14 @@
         <p:cNvGrpSpPr/>
         <p:nvPr/>
       </p:nvGrpSpPr>
-      <p:grpSpPr/>
+      <p:grpSpPr>
+        <a:xfrm>
+          <a:off x="0" y="0"/>
+          <a:ext cx="0" cy="0"/>
+          <a:chOff x="0" y="0"/>
+          <a:chExt cx="0" cy="0"/>
+        </a:xfrm>
+      </p:grpSpPr>
       <p:sp>
         <p:nvSpPr>
           <p:cNvPr id="2" name="Rectangle 1"/>
@@ -10912,7 +11984,12 @@
           <a:bodyPr rtlCol="0" anchor="ctr"/>
           <a:lstStyle/>
           <a:p>
-            <a:pPr algn="ctr"/>
+            <a:pPr algn="ctr">
+              <a:lnSpc>
+                <a:spcPct val="150000"/>
+              </a:lnSpc>
+            </a:pPr>
+            <a:endParaRPr/>
           </a:p>
         </p:txBody>
       </p:sp>
@@ -10925,7 +12002,7 @@
         <p:spPr>
           <a:xfrm>
             <a:off x="731520" y="365760"/>
-            <a:ext cx="10698480" cy="365760"/>
+            <a:ext cx="10698480" cy="222369"/>
           </a:xfrm>
           <a:prstGeom prst="rect">
             <a:avLst/>
@@ -10933,11 +12010,16 @@
           <a:noFill/>
         </p:spPr>
         <p:txBody>
-          <a:bodyPr wrap="square" lIns="0" rIns="0" tIns="0" bIns="0">
+          <a:bodyPr wrap="square" lIns="0" tIns="0" rIns="0" bIns="0">
             <a:spAutoFit/>
           </a:bodyPr>
           <a:lstStyle/>
           <a:p>
+            <a:pPr>
+              <a:lnSpc>
+                <a:spcPct val="150000"/>
+              </a:lnSpc>
+            </a:pPr>
             <a:r>
               <a:rPr sz="1100" b="1">
                 <a:solidFill>
@@ -10959,7 +12041,7 @@
         <p:spPr>
           <a:xfrm>
             <a:off x="731520" y="640080"/>
-            <a:ext cx="10698480" cy="640080"/>
+            <a:ext cx="10698480" cy="444737"/>
           </a:xfrm>
           <a:prstGeom prst="rect">
             <a:avLst/>
@@ -10967,11 +12049,16 @@
           <a:noFill/>
         </p:spPr>
         <p:txBody>
-          <a:bodyPr wrap="square" lIns="0" rIns="0" tIns="0" bIns="0">
+          <a:bodyPr wrap="square" lIns="0" tIns="0" rIns="0" bIns="0">
             <a:spAutoFit/>
           </a:bodyPr>
           <a:lstStyle/>
           <a:p>
+            <a:pPr>
+              <a:lnSpc>
+                <a:spcPct val="150000"/>
+              </a:lnSpc>
+            </a:pPr>
             <a:r>
               <a:rPr sz="2200" b="1">
                 <a:solidFill>
@@ -11025,7 +12112,12 @@
           <a:bodyPr rtlCol="0" anchor="ctr"/>
           <a:lstStyle/>
           <a:p>
-            <a:pPr algn="ctr"/>
+            <a:pPr algn="ctr">
+              <a:lnSpc>
+                <a:spcPct val="150000"/>
+              </a:lnSpc>
+            </a:pPr>
+            <a:endParaRPr/>
           </a:p>
         </p:txBody>
       </p:sp>
@@ -11038,7 +12130,7 @@
         <p:spPr>
           <a:xfrm>
             <a:off x="914400" y="1417320"/>
-            <a:ext cx="4389120" cy="4937760"/>
+            <a:ext cx="4389120" cy="4380238"/>
           </a:xfrm>
           <a:prstGeom prst="rect">
             <a:avLst/>
@@ -11051,6 +12143,11 @@
           </a:bodyPr>
           <a:lstStyle/>
           <a:p>
+            <a:pPr>
+              <a:lnSpc>
+                <a:spcPct val="150000"/>
+              </a:lnSpc>
+            </a:pPr>
             <a:r>
               <a:rPr sz="1200" b="1">
                 <a:solidFill>
@@ -11063,6 +12160,11 @@
             </a:r>
           </a:p>
           <a:p>
+            <a:pPr>
+              <a:lnSpc>
+                <a:spcPct val="150000"/>
+              </a:lnSpc>
+            </a:pPr>
             <a:r>
               <a:rPr sz="1050" b="1">
                 <a:solidFill>
@@ -11083,6 +12185,11 @@
             </a:r>
           </a:p>
           <a:p>
+            <a:pPr>
+              <a:lnSpc>
+                <a:spcPct val="150000"/>
+              </a:lnSpc>
+            </a:pPr>
             <a:r>
               <a:rPr sz="1050" b="1">
                 <a:solidFill>
@@ -11103,6 +12210,11 @@
             </a:r>
           </a:p>
           <a:p>
+            <a:pPr>
+              <a:lnSpc>
+                <a:spcPct val="150000"/>
+              </a:lnSpc>
+            </a:pPr>
             <a:r>
               <a:rPr sz="1050" b="1">
                 <a:solidFill>
@@ -11123,6 +12235,11 @@
             </a:r>
           </a:p>
           <a:p>
+            <a:pPr>
+              <a:lnSpc>
+                <a:spcPct val="150000"/>
+              </a:lnSpc>
+            </a:pPr>
             <a:r>
               <a:rPr sz="1050" b="1">
                 <a:solidFill>
@@ -11143,6 +12260,11 @@
             </a:r>
           </a:p>
           <a:p>
+            <a:pPr>
+              <a:lnSpc>
+                <a:spcPct val="150000"/>
+              </a:lnSpc>
+            </a:pPr>
             <a:r>
               <a:rPr sz="1050" b="1">
                 <a:solidFill>
@@ -11163,6 +12285,11 @@
             </a:r>
           </a:p>
           <a:p>
+            <a:pPr>
+              <a:lnSpc>
+                <a:spcPct val="150000"/>
+              </a:lnSpc>
+            </a:pPr>
             <a:r>
               <a:rPr sz="1050" b="1">
                 <a:solidFill>
@@ -11249,7 +12376,12 @@
           <a:bodyPr rtlCol="0" anchor="ctr"/>
           <a:lstStyle/>
           <a:p>
-            <a:pPr algn="ctr"/>
+            <a:pPr algn="ctr">
+              <a:lnSpc>
+                <a:spcPct val="150000"/>
+              </a:lnSpc>
+            </a:pPr>
+            <a:endParaRPr/>
           </a:p>
         </p:txBody>
       </p:sp>
@@ -11262,7 +12394,7 @@
         <p:spPr>
           <a:xfrm>
             <a:off x="5806440" y="4846320"/>
-            <a:ext cx="5516575" cy="1554480"/>
+            <a:ext cx="5516575" cy="1264000"/>
           </a:xfrm>
           <a:prstGeom prst="rect">
             <a:avLst/>
@@ -11275,6 +12407,11 @@
           </a:bodyPr>
           <a:lstStyle/>
           <a:p>
+            <a:pPr>
+              <a:lnSpc>
+                <a:spcPct val="150000"/>
+              </a:lnSpc>
+            </a:pPr>
             <a:r>
               <a:rPr sz="1100" b="1">
                 <a:solidFill>
@@ -11287,6 +12424,11 @@
             </a:r>
           </a:p>
           <a:p>
+            <a:pPr>
+              <a:lnSpc>
+                <a:spcPct val="150000"/>
+              </a:lnSpc>
+            </a:pPr>
             <a:r>
               <a:rPr sz="1000" b="0">
                 <a:solidFill>
@@ -11308,7 +12450,7 @@
 </file>
 
 <file path=ppt/slides/slide9.xml><?xml version="1.0" encoding="utf-8"?>
-<p:sld xmlns:a="http://schemas.openxmlformats.org/drawingml/2006/main" xmlns:p="http://schemas.openxmlformats.org/presentationml/2006/main" xmlns:r="http://schemas.openxmlformats.org/officeDocument/2006/relationships">
+<p:sld xmlns:a="http://schemas.openxmlformats.org/drawingml/2006/main" xmlns:r="http://schemas.openxmlformats.org/officeDocument/2006/relationships" xmlns:p="http://schemas.openxmlformats.org/presentationml/2006/main">
   <p:cSld>
     <p:spTree>
       <p:nvGrpSpPr>
@@ -11316,7 +12458,14 @@
         <p:cNvGrpSpPr/>
         <p:nvPr/>
       </p:nvGrpSpPr>
-      <p:grpSpPr/>
+      <p:grpSpPr>
+        <a:xfrm>
+          <a:off x="0" y="0"/>
+          <a:ext cx="0" cy="0"/>
+          <a:chOff x="0" y="0"/>
+          <a:chExt cx="0" cy="0"/>
+        </a:xfrm>
+      </p:grpSpPr>
       <p:sp>
         <p:nvSpPr>
           <p:cNvPr id="2" name="Rectangle 1"/>
@@ -11356,7 +12505,12 @@
           <a:bodyPr rtlCol="0" anchor="ctr"/>
           <a:lstStyle/>
           <a:p>
-            <a:pPr algn="ctr"/>
+            <a:pPr algn="ctr">
+              <a:lnSpc>
+                <a:spcPct val="150000"/>
+              </a:lnSpc>
+            </a:pPr>
+            <a:endParaRPr/>
           </a:p>
         </p:txBody>
       </p:sp>
@@ -11369,7 +12523,7 @@
         <p:spPr>
           <a:xfrm>
             <a:off x="731520" y="365760"/>
-            <a:ext cx="10698480" cy="365760"/>
+            <a:ext cx="10698480" cy="222369"/>
           </a:xfrm>
           <a:prstGeom prst="rect">
             <a:avLst/>
@@ -11377,11 +12531,16 @@
           <a:noFill/>
         </p:spPr>
         <p:txBody>
-          <a:bodyPr wrap="square" lIns="0" rIns="0" tIns="0" bIns="0">
+          <a:bodyPr wrap="square" lIns="0" tIns="0" rIns="0" bIns="0">
             <a:spAutoFit/>
           </a:bodyPr>
           <a:lstStyle/>
           <a:p>
+            <a:pPr>
+              <a:lnSpc>
+                <a:spcPct val="150000"/>
+              </a:lnSpc>
+            </a:pPr>
             <a:r>
               <a:rPr sz="1100" b="1">
                 <a:solidFill>
@@ -11403,7 +12562,7 @@
         <p:spPr>
           <a:xfrm>
             <a:off x="731520" y="640080"/>
-            <a:ext cx="10698480" cy="640080"/>
+            <a:ext cx="10698480" cy="444737"/>
           </a:xfrm>
           <a:prstGeom prst="rect">
             <a:avLst/>
@@ -11411,11 +12570,16 @@
           <a:noFill/>
         </p:spPr>
         <p:txBody>
-          <a:bodyPr wrap="square" lIns="0" rIns="0" tIns="0" bIns="0">
+          <a:bodyPr wrap="square" lIns="0" tIns="0" rIns="0" bIns="0">
             <a:spAutoFit/>
           </a:bodyPr>
           <a:lstStyle/>
           <a:p>
+            <a:pPr>
+              <a:lnSpc>
+                <a:spcPct val="150000"/>
+              </a:lnSpc>
+            </a:pPr>
             <a:r>
               <a:rPr sz="2200" b="1">
                 <a:solidFill>
@@ -11469,7 +12633,12 @@
           <a:bodyPr rtlCol="0" anchor="ctr"/>
           <a:lstStyle/>
           <a:p>
-            <a:pPr algn="ctr"/>
+            <a:pPr algn="ctr">
+              <a:lnSpc>
+                <a:spcPct val="150000"/>
+              </a:lnSpc>
+            </a:pPr>
+            <a:endParaRPr/>
           </a:p>
         </p:txBody>
       </p:sp>
@@ -11482,7 +12651,7 @@
         <p:spPr>
           <a:xfrm>
             <a:off x="914400" y="1417320"/>
-            <a:ext cx="4389120" cy="4937760"/>
+            <a:ext cx="4389120" cy="3918573"/>
           </a:xfrm>
           <a:prstGeom prst="rect">
             <a:avLst/>
@@ -11495,6 +12664,11 @@
           </a:bodyPr>
           <a:lstStyle/>
           <a:p>
+            <a:pPr>
+              <a:lnSpc>
+                <a:spcPct val="150000"/>
+              </a:lnSpc>
+            </a:pPr>
             <a:r>
               <a:rPr sz="1200" b="1">
                 <a:solidFill>
@@ -11507,6 +12681,11 @@
             </a:r>
           </a:p>
           <a:p>
+            <a:pPr>
+              <a:lnSpc>
+                <a:spcPct val="150000"/>
+              </a:lnSpc>
+            </a:pPr>
             <a:r>
               <a:rPr sz="1050" b="1">
                 <a:solidFill>
@@ -11527,6 +12706,11 @@
             </a:r>
           </a:p>
           <a:p>
+            <a:pPr>
+              <a:lnSpc>
+                <a:spcPct val="150000"/>
+              </a:lnSpc>
+            </a:pPr>
             <a:r>
               <a:rPr sz="1050" b="1">
                 <a:solidFill>
@@ -11547,6 +12731,11 @@
             </a:r>
           </a:p>
           <a:p>
+            <a:pPr>
+              <a:lnSpc>
+                <a:spcPct val="150000"/>
+              </a:lnSpc>
+            </a:pPr>
             <a:r>
               <a:rPr sz="1050" b="1">
                 <a:solidFill>
@@ -11567,6 +12756,11 @@
             </a:r>
           </a:p>
           <a:p>
+            <a:pPr>
+              <a:lnSpc>
+                <a:spcPct val="150000"/>
+              </a:lnSpc>
+            </a:pPr>
             <a:r>
               <a:rPr sz="1050" b="1">
                 <a:solidFill>
@@ -11587,6 +12781,11 @@
             </a:r>
           </a:p>
           <a:p>
+            <a:pPr>
+              <a:lnSpc>
+                <a:spcPct val="150000"/>
+              </a:lnSpc>
+            </a:pPr>
             <a:r>
               <a:rPr sz="1050" b="1">
                 <a:solidFill>
@@ -11607,6 +12806,11 @@
             </a:r>
           </a:p>
           <a:p>
+            <a:pPr>
+              <a:lnSpc>
+                <a:spcPct val="150000"/>
+              </a:lnSpc>
+            </a:pPr>
             <a:r>
               <a:rPr sz="1050" b="1">
                 <a:solidFill>
@@ -11693,7 +12897,12 @@
           <a:bodyPr rtlCol="0" anchor="ctr"/>
           <a:lstStyle/>
           <a:p>
-            <a:pPr algn="ctr"/>
+            <a:pPr algn="ctr">
+              <a:lnSpc>
+                <a:spcPct val="150000"/>
+              </a:lnSpc>
+            </a:pPr>
+            <a:endParaRPr/>
           </a:p>
         </p:txBody>
       </p:sp>
@@ -11706,7 +12915,7 @@
         <p:spPr>
           <a:xfrm>
             <a:off x="5806440" y="5257800"/>
-            <a:ext cx="5516575" cy="1143000"/>
+            <a:ext cx="5516575" cy="1033168"/>
           </a:xfrm>
           <a:prstGeom prst="rect">
             <a:avLst/>
@@ -11719,6 +12928,11 @@
           </a:bodyPr>
           <a:lstStyle/>
           <a:p>
+            <a:pPr>
+              <a:lnSpc>
+                <a:spcPct val="150000"/>
+              </a:lnSpc>
+            </a:pPr>
             <a:r>
               <a:rPr sz="1100" b="1">
                 <a:solidFill>
@@ -11731,6 +12945,11 @@
             </a:r>
           </a:p>
           <a:p>
+            <a:pPr>
+              <a:lnSpc>
+                <a:spcPct val="150000"/>
+              </a:lnSpc>
+            </a:pPr>
             <a:r>
               <a:rPr sz="1000" b="0">
                 <a:solidFill>
